--- a/site-assets/sources/day2/fig-ja-en.pptx
+++ b/site-assets/sources/day2/fig-ja-en.pptx
@@ -6,21 +6,21 @@
   </p:sldMasterIdLst>
   <p:sldIdLst>
     <p:sldId id="256" r:id="rId2"/>
-    <p:sldId id="264" r:id="rId14"/>
-    <p:sldId id="257" r:id="rId3"/>
-    <p:sldId id="265" r:id="rId15"/>
-    <p:sldId id="258" r:id="rId4"/>
-    <p:sldId id="266" r:id="rId16"/>
-    <p:sldId id="259" r:id="rId5"/>
-    <p:sldId id="267" r:id="rId17"/>
-    <p:sldId id="260" r:id="rId6"/>
-    <p:sldId id="268" r:id="rId18"/>
-    <p:sldId id="261" r:id="rId7"/>
-    <p:sldId id="269" r:id="rId19"/>
-    <p:sldId id="263" r:id="rId8"/>
-    <p:sldId id="270" r:id="rId20"/>
-    <p:sldId id="262" r:id="rId9"/>
-    <p:sldId id="271" r:id="rId21"/>
+    <p:sldId id="264" r:id="rId3"/>
+    <p:sldId id="257" r:id="rId4"/>
+    <p:sldId id="265" r:id="rId5"/>
+    <p:sldId id="258" r:id="rId6"/>
+    <p:sldId id="266" r:id="rId7"/>
+    <p:sldId id="259" r:id="rId8"/>
+    <p:sldId id="267" r:id="rId9"/>
+    <p:sldId id="260" r:id="rId10"/>
+    <p:sldId id="268" r:id="rId11"/>
+    <p:sldId id="261" r:id="rId12"/>
+    <p:sldId id="269" r:id="rId13"/>
+    <p:sldId id="263" r:id="rId14"/>
+    <p:sldId id="270" r:id="rId15"/>
+    <p:sldId id="262" r:id="rId16"/>
+    <p:sldId id="271" r:id="rId17"/>
   </p:sldIdLst>
   <p:sldSz cx="9906000" cy="6858000" type="A4"/>
   <p:notesSz cx="6858000" cy="9144000"/>
@@ -257,7 +257,7 @@
           <a:lstStyle/>
           <a:p>
             <a:fld id="{ACB7CCA1-9DD8-A242-AF72-AF27A73B7972}" type="datetimeFigureOut">
-              <a:t>2018/10/29</a:t>
+              <a:t>2026/8/6</a:t>
             </a:fld>
             <a:endParaRPr kumimoji="1" lang="ja-JP" altLang="en-US"/>
           </a:p>
@@ -433,7 +433,7 @@
           <a:lstStyle/>
           <a:p>
             <a:fld id="{ACB7CCA1-9DD8-A242-AF72-AF27A73B7972}" type="datetimeFigureOut">
-              <a:t>2018/10/29</a:t>
+              <a:t>2026/8/6</a:t>
             </a:fld>
             <a:endParaRPr kumimoji="1" lang="ja-JP" altLang="en-US"/>
           </a:p>
@@ -619,7 +619,7 @@
           <a:lstStyle/>
           <a:p>
             <a:fld id="{ACB7CCA1-9DD8-A242-AF72-AF27A73B7972}" type="datetimeFigureOut">
-              <a:t>2018/10/29</a:t>
+              <a:t>2026/8/6</a:t>
             </a:fld>
             <a:endParaRPr kumimoji="1" lang="ja-JP" altLang="en-US"/>
           </a:p>
@@ -795,7 +795,7 @@
           <a:lstStyle/>
           <a:p>
             <a:fld id="{ACB7CCA1-9DD8-A242-AF72-AF27A73B7972}" type="datetimeFigureOut">
-              <a:t>2018/10/29</a:t>
+              <a:t>2026/8/6</a:t>
             </a:fld>
             <a:endParaRPr kumimoji="1" lang="ja-JP" altLang="en-US"/>
           </a:p>
@@ -1074,7 +1074,7 @@
           <a:lstStyle/>
           <a:p>
             <a:fld id="{ACB7CCA1-9DD8-A242-AF72-AF27A73B7972}" type="datetimeFigureOut">
-              <a:t>2018/10/29</a:t>
+              <a:t>2026/8/6</a:t>
             </a:fld>
             <a:endParaRPr kumimoji="1" lang="ja-JP" altLang="en-US"/>
           </a:p>
@@ -1320,7 +1320,7 @@
           <a:lstStyle/>
           <a:p>
             <a:fld id="{ACB7CCA1-9DD8-A242-AF72-AF27A73B7972}" type="datetimeFigureOut">
-              <a:t>2018/10/29</a:t>
+              <a:t>2026/8/6</a:t>
             </a:fld>
             <a:endParaRPr kumimoji="1" lang="ja-JP" altLang="en-US"/>
           </a:p>
@@ -1775,7 +1775,7 @@
           <a:lstStyle/>
           <a:p>
             <a:fld id="{ACB7CCA1-9DD8-A242-AF72-AF27A73B7972}" type="datetimeFigureOut">
-              <a:t>2018/10/29</a:t>
+              <a:t>2026/8/6</a:t>
             </a:fld>
             <a:endParaRPr kumimoji="1" lang="ja-JP" altLang="en-US"/>
           </a:p>
@@ -1891,7 +1891,7 @@
           <a:lstStyle/>
           <a:p>
             <a:fld id="{ACB7CCA1-9DD8-A242-AF72-AF27A73B7972}" type="datetimeFigureOut">
-              <a:t>2018/10/29</a:t>
+              <a:t>2026/8/6</a:t>
             </a:fld>
             <a:endParaRPr kumimoji="1" lang="ja-JP" altLang="en-US"/>
           </a:p>
@@ -1984,7 +1984,7 @@
           <a:lstStyle/>
           <a:p>
             <a:fld id="{ACB7CCA1-9DD8-A242-AF72-AF27A73B7972}" type="datetimeFigureOut">
-              <a:t>2018/10/29</a:t>
+              <a:t>2026/8/6</a:t>
             </a:fld>
             <a:endParaRPr kumimoji="1" lang="ja-JP" altLang="en-US"/>
           </a:p>
@@ -2304,7 +2304,7 @@
           <a:lstStyle/>
           <a:p>
             <a:fld id="{ACB7CCA1-9DD8-A242-AF72-AF27A73B7972}" type="datetimeFigureOut">
-              <a:t>2018/10/29</a:t>
+              <a:t>2026/8/6</a:t>
             </a:fld>
             <a:endParaRPr kumimoji="1" lang="ja-JP" altLang="en-US"/>
           </a:p>
@@ -2596,7 +2596,7 @@
           <a:lstStyle/>
           <a:p>
             <a:fld id="{ACB7CCA1-9DD8-A242-AF72-AF27A73B7972}" type="datetimeFigureOut">
-              <a:t>2018/10/29</a:t>
+              <a:t>2026/8/6</a:t>
             </a:fld>
             <a:endParaRPr kumimoji="1" lang="ja-JP" altLang="en-US"/>
           </a:p>
@@ -2815,7 +2815,7 @@
           </a:lstStyle>
           <a:p>
             <a:fld id="{ACB7CCA1-9DD8-A242-AF72-AF27A73B7972}" type="datetimeFigureOut">
-              <a:t>2018/10/29</a:t>
+              <a:t>2026/8/6</a:t>
             </a:fld>
             <a:endParaRPr kumimoji="1" lang="ja-JP" altLang="en-US"/>
           </a:p>
@@ -4379,7 +4379,7 @@
               <a:defRPr sz="1450"/>
             </a:pPr>
             <a:r>
-              <a:rPr lang="ja-JP" altLang="en-US" dirty="0" sz="1450"/>
+              <a:rPr lang="ja-JP" altLang="en-US" sz="1450" dirty="0"/>
               <a:t>Compute node</a:t>
             </a:r>
             <a:endParaRPr lang="en-US" altLang="ja-JP" dirty="0"/>
@@ -4745,7 +4745,7 @@
         </p:spPr>
         <p:txBody>
           <a:bodyPr wrap="square" rtlCol="0">
-            <a:normAutofit/>
+            <a:normAutofit fontScale="62500" lnSpcReduction="20000"/>
           </a:bodyPr>
           <a:lstStyle/>
           <a:p>
@@ -5851,7 +5851,7 @@
         </p:spPr>
         <p:txBody>
           <a:bodyPr wrap="square" rtlCol="0">
-            <a:normAutofit/>
+            <a:normAutofit fontScale="85000" lnSpcReduction="20000"/>
           </a:bodyPr>
           <a:lstStyle/>
           <a:p>
@@ -5969,7 +5969,7 @@
               <a:defRPr sz="1550"/>
             </a:pPr>
             <a:r>
-              <a:rPr lang="ja-JP" altLang="en-US" dirty="0" sz="1550"/>
+              <a:rPr lang="ja-JP" altLang="en-US" sz="1550" dirty="0"/>
               <a:t>Hotel</a:t>
             </a:r>
             <a:endParaRPr lang="en-US" altLang="ja-JP" dirty="0"/>
@@ -5979,7 +5979,7 @@
               <a:defRPr sz="1550"/>
             </a:pPr>
             <a:r>
-              <a:rPr lang="ja-JP" altLang="en-US" dirty="0" sz="1550"/>
+              <a:rPr lang="ja-JP" altLang="en-US" sz="1550" dirty="0"/>
               <a:t>(local file system)</a:t>
             </a:r>
             <a:endParaRPr lang="en-US" altLang="ja-JP" dirty="0"/>
@@ -6010,7 +6010,7 @@
               <a:defRPr sz="1550"/>
             </a:pPr>
             <a:r>
-              <a:rPr lang="ja-JP" altLang="en-US" dirty="0" sz="1550"/>
+              <a:rPr lang="ja-JP" altLang="en-US" sz="1550" dirty="0"/>
               <a:t>Home</a:t>
             </a:r>
             <a:endParaRPr lang="en-US" altLang="ja-JP" dirty="0"/>
@@ -6020,7 +6020,7 @@
               <a:defRPr sz="1550"/>
             </a:pPr>
             <a:r>
-              <a:rPr lang="ja-JP" altLang="en-US" dirty="0" sz="1550"/>
+              <a:rPr lang="ja-JP" altLang="en-US" sz="1550" dirty="0"/>
               <a:t>(global file system)</a:t>
             </a:r>
             <a:endParaRPr lang="en-US" altLang="ja-JP" dirty="0"/>
@@ -6045,7 +6045,7 @@
         </p:spPr>
         <p:txBody>
           <a:bodyPr wrap="square" rtlCol="0">
-            <a:normAutofit/>
+            <a:normAutofit fontScale="55000" lnSpcReduction="20000"/>
           </a:bodyPr>
           <a:lstStyle/>
           <a:p>
@@ -6238,7 +6238,7 @@
         </p:spPr>
         <p:txBody>
           <a:bodyPr wrap="square" rtlCol="0">
-            <a:normAutofit/>
+            <a:normAutofit fontScale="62500" lnSpcReduction="20000"/>
           </a:bodyPr>
           <a:lstStyle/>
           <a:p>
@@ -6440,7 +6440,7 @@
         </p:spPr>
         <p:txBody>
           <a:bodyPr wrap="square" rtlCol="0">
-            <a:normAutofit/>
+            <a:normAutofit fontScale="85000" lnSpcReduction="20000"/>
           </a:bodyPr>
           <a:lstStyle/>
           <a:p>
@@ -6489,7 +6489,7 @@
               <a:defRPr sz="1750"/>
             </a:pPr>
             <a:r>
-              <a:rPr kumimoji="1" lang="ja-JP" altLang="en-US" dirty="0" sz="1750"/>
+              <a:rPr kumimoji="1" lang="ja-JP" altLang="en-US" sz="1750" dirty="0"/>
               <a:t>At job start</a:t>
             </a:r>
           </a:p>
@@ -6556,7 +6556,6 @@
               <a:rPr kumimoji="1" lang="ja-JP" altLang="en-US" dirty="0"/>
               <a:t>At job end</a:t>
             </a:r>
-            <a:endParaRPr kumimoji="1" lang="ja-JP" altLang="en-US" dirty="0"/>
           </a:p>
         </p:txBody>
       </p:sp>
@@ -9687,7 +9686,7 @@
           </a:fontRef>
         </p:style>
         <p:txBody>
-          <a:bodyPr rtlCol="0" anchor="ctr" wrap="square"/>
+          <a:bodyPr wrap="square" rtlCol="0" anchor="ctr"/>
           <a:lstStyle/>
           <a:p>
             <a:pPr algn="ctr">
@@ -9757,7 +9756,7 @@
           </a:fontRef>
         </p:style>
         <p:txBody>
-          <a:bodyPr rtlCol="0" anchor="ctr" wrap="square"/>
+          <a:bodyPr wrap="square" rtlCol="0" anchor="ctr"/>
           <a:lstStyle/>
           <a:p>
             <a:pPr algn="ctr">
@@ -9827,7 +9826,7 @@
           </a:fontRef>
         </p:style>
         <p:txBody>
-          <a:bodyPr rtlCol="0" anchor="ctr" wrap="square"/>
+          <a:bodyPr wrap="square" rtlCol="0" anchor="ctr"/>
           <a:lstStyle/>
           <a:p>
             <a:pPr algn="ctr">
@@ -9897,7 +9896,7 @@
           </a:fontRef>
         </p:style>
         <p:txBody>
-          <a:bodyPr rtlCol="0" anchor="ctr" wrap="square"/>
+          <a:bodyPr wrap="square" rtlCol="0" anchor="ctr"/>
           <a:lstStyle/>
           <a:p>
             <a:pPr algn="ctr">
@@ -9977,7 +9976,6 @@
               <a:rPr kumimoji="1" lang="en-US" altLang="ja-JP" sz="1200"/>
               <a:t>User A's job</a:t>
             </a:r>
-            <a:endParaRPr kumimoji="1" lang="en-US" altLang="ja-JP" sz="1200"/>
           </a:p>
         </p:txBody>
       </p:sp>
@@ -10037,7 +10035,6 @@
               <a:rPr kumimoji="1" lang="en-US" altLang="ja-JP" sz="1200"/>
               <a:t>User A's job</a:t>
             </a:r>
-            <a:endParaRPr kumimoji="1" lang="en-US" altLang="ja-JP" sz="1200"/>
           </a:p>
         </p:txBody>
       </p:sp>
@@ -10097,7 +10094,6 @@
               <a:rPr kumimoji="1" lang="en-US" altLang="ja-JP" sz="1200"/>
               <a:t>User A's job</a:t>
             </a:r>
-            <a:endParaRPr kumimoji="1" lang="en-US" altLang="ja-JP" sz="1200"/>
           </a:p>
         </p:txBody>
       </p:sp>
@@ -10157,7 +10153,6 @@
               <a:rPr kumimoji="1" lang="en-US" altLang="ja-JP" sz="1200"/>
               <a:t>User A's job</a:t>
             </a:r>
-            <a:endParaRPr kumimoji="1" lang="en-US" altLang="ja-JP" sz="1200"/>
           </a:p>
         </p:txBody>
       </p:sp>
@@ -10217,7 +10212,6 @@
               <a:rPr kumimoji="1" lang="en-US" altLang="ja-JP" sz="1200"/>
               <a:t>User A's job</a:t>
             </a:r>
-            <a:endParaRPr kumimoji="1" lang="en-US" altLang="ja-JP" sz="1200"/>
           </a:p>
         </p:txBody>
       </p:sp>
@@ -10277,7 +10271,6 @@
               <a:rPr kumimoji="1" lang="en-US" altLang="ja-JP" sz="1200"/>
               <a:t>User A's job</a:t>
             </a:r>
-            <a:endParaRPr kumimoji="1" lang="en-US" altLang="ja-JP" sz="1200"/>
           </a:p>
         </p:txBody>
       </p:sp>
@@ -10337,7 +10330,6 @@
               <a:rPr kumimoji="1" lang="en-US" altLang="ja-JP" sz="1200"/>
               <a:t>User B's job</a:t>
             </a:r>
-            <a:endParaRPr kumimoji="1" lang="en-US" altLang="ja-JP" sz="1200"/>
           </a:p>
         </p:txBody>
       </p:sp>
@@ -11087,7 +11079,7 @@
           </a:fontRef>
         </p:style>
         <p:txBody>
-          <a:bodyPr rtlCol="0" anchor="ctr" wrap="square"/>
+          <a:bodyPr wrap="square" rtlCol="0" anchor="ctr"/>
           <a:lstStyle/>
           <a:p>
             <a:pPr algn="ctr">
@@ -11157,7 +11149,7 @@
           </a:fontRef>
         </p:style>
         <p:txBody>
-          <a:bodyPr rtlCol="0" anchor="ctr" wrap="square"/>
+          <a:bodyPr wrap="square" rtlCol="0" anchor="ctr"/>
           <a:lstStyle/>
           <a:p>
             <a:pPr algn="ctr">
@@ -11227,7 +11219,7 @@
           </a:fontRef>
         </p:style>
         <p:txBody>
-          <a:bodyPr rtlCol="0" anchor="ctr" wrap="square"/>
+          <a:bodyPr wrap="square" rtlCol="0" anchor="ctr"/>
           <a:lstStyle/>
           <a:p>
             <a:pPr algn="ctr">
@@ -11297,7 +11289,7 @@
           </a:fontRef>
         </p:style>
         <p:txBody>
-          <a:bodyPr rtlCol="0" anchor="ctr" wrap="square"/>
+          <a:bodyPr wrap="square" rtlCol="0" anchor="ctr"/>
           <a:lstStyle/>
           <a:p>
             <a:pPr algn="ctr">
@@ -11377,7 +11369,6 @@
               <a:rPr kumimoji="1" lang="en-US" altLang="ja-JP" sz="1200"/>
               <a:t>User A's job</a:t>
             </a:r>
-            <a:endParaRPr kumimoji="1" lang="en-US" altLang="ja-JP" sz="1200"/>
           </a:p>
         </p:txBody>
       </p:sp>
@@ -11437,7 +11428,6 @@
               <a:rPr kumimoji="1" lang="en-US" altLang="ja-JP" sz="1200"/>
               <a:t>User A's job</a:t>
             </a:r>
-            <a:endParaRPr kumimoji="1" lang="en-US" altLang="ja-JP" sz="1200"/>
           </a:p>
         </p:txBody>
       </p:sp>
@@ -11497,7 +11487,6 @@
               <a:rPr kumimoji="1" lang="en-US" altLang="ja-JP" sz="1200"/>
               <a:t>User A's job</a:t>
             </a:r>
-            <a:endParaRPr kumimoji="1" lang="en-US" altLang="ja-JP" sz="1200"/>
           </a:p>
         </p:txBody>
       </p:sp>
@@ -11557,7 +11546,6 @@
               <a:rPr kumimoji="1" lang="en-US" altLang="ja-JP" sz="1200"/>
               <a:t>User A's job</a:t>
             </a:r>
-            <a:endParaRPr kumimoji="1" lang="en-US" altLang="ja-JP" sz="1200"/>
           </a:p>
         </p:txBody>
       </p:sp>
@@ -11617,7 +11605,6 @@
               <a:rPr kumimoji="1" lang="en-US" altLang="ja-JP" sz="1200"/>
               <a:t>User A's job</a:t>
             </a:r>
-            <a:endParaRPr kumimoji="1" lang="en-US" altLang="ja-JP" sz="1200"/>
           </a:p>
         </p:txBody>
       </p:sp>
@@ -11677,7 +11664,6 @@
               <a:rPr kumimoji="1" lang="en-US" altLang="ja-JP" sz="1200"/>
               <a:t>User A's job</a:t>
             </a:r>
-            <a:endParaRPr kumimoji="1" lang="en-US" altLang="ja-JP" sz="1200"/>
           </a:p>
         </p:txBody>
       </p:sp>
@@ -11737,7 +11723,6 @@
               <a:rPr kumimoji="1" lang="en-US" altLang="ja-JP" sz="1200"/>
               <a:t>User B's job</a:t>
             </a:r>
-            <a:endParaRPr kumimoji="1" lang="en-US" altLang="ja-JP" sz="1200"/>
           </a:p>
         </p:txBody>
       </p:sp>
@@ -14578,7 +14563,6 @@
               <a:rPr kumimoji="1" lang="en-US" altLang="ja-JP" sz="1200"/>
               <a:t>1-node job</a:t>
             </a:r>
-            <a:endParaRPr kumimoji="1" lang="en-US" altLang="ja-JP" sz="1200"/>
           </a:p>
           <a:p>
             <a:pPr algn="ctr">
@@ -14588,7 +14572,6 @@
               <a:rPr kumimoji="1" lang="en-US" altLang="ja-JP" sz="1200"/>
               <a:t>(running)</a:t>
             </a:r>
-            <a:endParaRPr kumimoji="1" lang="en-US" altLang="ja-JP" sz="1200"/>
           </a:p>
         </p:txBody>
       </p:sp>
@@ -14658,7 +14641,7 @@
         </p:spPr>
         <p:txBody>
           <a:bodyPr wrap="square" rtlCol="0">
-            <a:normAutofit/>
+            <a:normAutofit fontScale="55000" lnSpcReduction="20000"/>
           </a:bodyPr>
           <a:lstStyle/>
           <a:p>
@@ -14738,7 +14721,7 @@
         </p:spPr>
         <p:txBody>
           <a:bodyPr wrap="square" rtlCol="0">
-            <a:normAutofit/>
+            <a:normAutofit fontScale="55000" lnSpcReduction="20000"/>
           </a:bodyPr>
           <a:lstStyle/>
           <a:p>
@@ -14889,7 +14872,7 @@
         </p:spPr>
         <p:txBody>
           <a:bodyPr wrap="square" rtlCol="0">
-            <a:normAutofit/>
+            <a:normAutofit fontScale="55000" lnSpcReduction="20000"/>
           </a:bodyPr>
           <a:lstStyle/>
           <a:p>
@@ -14928,7 +14911,7 @@
         </p:spPr>
         <p:txBody>
           <a:bodyPr wrap="square" rtlCol="0">
-            <a:normAutofit/>
+            <a:normAutofit fontScale="55000" lnSpcReduction="20000"/>
           </a:bodyPr>
           <a:lstStyle/>
           <a:p>
@@ -14967,7 +14950,7 @@
         </p:spPr>
         <p:txBody>
           <a:bodyPr wrap="square" rtlCol="0">
-            <a:normAutofit/>
+            <a:normAutofit fontScale="55000" lnSpcReduction="20000"/>
           </a:bodyPr>
           <a:lstStyle/>
           <a:p>
@@ -15363,7 +15346,6 @@
               <a:rPr kumimoji="1" lang="en-US" altLang="ja-JP" sz="1200"/>
               <a:t>1-node job</a:t>
             </a:r>
-            <a:endParaRPr kumimoji="1" lang="en-US" altLang="ja-JP" sz="1200"/>
           </a:p>
           <a:p>
             <a:pPr algn="ctr">
@@ -15373,7 +15355,6 @@
               <a:rPr kumimoji="1" lang="en-US" altLang="ja-JP" sz="1200"/>
               <a:t>(running)</a:t>
             </a:r>
-            <a:endParaRPr kumimoji="1" lang="en-US" altLang="ja-JP" sz="1200"/>
           </a:p>
         </p:txBody>
       </p:sp>
@@ -15443,7 +15424,7 @@
         </p:spPr>
         <p:txBody>
           <a:bodyPr wrap="square" rtlCol="0">
-            <a:normAutofit/>
+            <a:normAutofit fontScale="55000" lnSpcReduction="20000"/>
           </a:bodyPr>
           <a:lstStyle/>
           <a:p>
@@ -15523,7 +15504,7 @@
         </p:spPr>
         <p:txBody>
           <a:bodyPr wrap="square" rtlCol="0">
-            <a:normAutofit/>
+            <a:normAutofit fontScale="55000" lnSpcReduction="20000"/>
           </a:bodyPr>
           <a:lstStyle/>
           <a:p>
@@ -15612,7 +15593,7 @@
         </p:spPr>
         <p:txBody>
           <a:bodyPr wrap="square" rtlCol="0">
-            <a:normAutofit/>
+            <a:normAutofit fontScale="55000" lnSpcReduction="20000"/>
           </a:bodyPr>
           <a:lstStyle/>
           <a:p>
@@ -16001,7 +15982,7 @@
         </p:spPr>
         <p:txBody>
           <a:bodyPr vert="eaVert" wrap="square" rtlCol="0">
-            <a:normAutofit/>
+            <a:normAutofit fontScale="85000" lnSpcReduction="10000"/>
           </a:bodyPr>
           <a:lstStyle/>
           <a:p>
@@ -16748,7 +16729,7 @@
               <a:defRPr sz="1450"/>
             </a:pPr>
             <a:r>
-              <a:rPr kumimoji="1" lang="ja-JP" altLang="en-US" dirty="0" sz="1450"/>
+              <a:rPr kumimoji="1" lang="ja-JP" altLang="en-US" sz="1450" dirty="0"/>
               <a:t>Compute node</a:t>
             </a:r>
           </a:p>
@@ -17027,7 +17008,7 @@
         </p:spPr>
         <p:txBody>
           <a:bodyPr wrap="square" rtlCol="0">
-            <a:normAutofit/>
+            <a:normAutofit fontScale="55000" lnSpcReduction="20000"/>
           </a:bodyPr>
           <a:lstStyle/>
           <a:p>
@@ -17977,7 +17958,7 @@
         </p:spPr>
         <p:txBody>
           <a:bodyPr wrap="square" rtlCol="0">
-            <a:normAutofit/>
+            <a:normAutofit fontScale="62500" lnSpcReduction="20000"/>
           </a:bodyPr>
           <a:lstStyle/>
           <a:p>
@@ -18447,7 +18428,7 @@
         </p:spPr>
         <p:txBody>
           <a:bodyPr wrap="square" rtlCol="0">
-            <a:normAutofit/>
+            <a:normAutofit fontScale="62500" lnSpcReduction="20000"/>
           </a:bodyPr>
           <a:lstStyle/>
           <a:p>
@@ -19362,7 +19343,7 @@
         </p:blipFill>
         <p:spPr>
           <a:xfrm>
-            <a:off x="2481580" y="2306320"/>
+            <a:off x="2481580" y="2333372"/>
             <a:ext cx="1003300" cy="1003300"/>
           </a:xfrm>
           <a:prstGeom prst="rect">
@@ -19392,7 +19373,7 @@
         </p:blipFill>
         <p:spPr>
           <a:xfrm>
-            <a:off x="3202940" y="3690620"/>
+            <a:off x="3202940" y="3685540"/>
             <a:ext cx="1143000" cy="1143000"/>
           </a:xfrm>
           <a:prstGeom prst="rect">
@@ -19422,7 +19403,7 @@
         </p:blipFill>
         <p:spPr>
           <a:xfrm>
-            <a:off x="4655820" y="3721100"/>
+            <a:off x="4655820" y="3685540"/>
             <a:ext cx="1143000" cy="1143000"/>
           </a:xfrm>
           <a:prstGeom prst="rect">
@@ -19452,7 +19433,7 @@
         </p:blipFill>
         <p:spPr>
           <a:xfrm>
-            <a:off x="6047740" y="3721100"/>
+            <a:off x="6047740" y="3685540"/>
             <a:ext cx="1143000" cy="1143000"/>
           </a:xfrm>
           <a:prstGeom prst="rect">
@@ -19482,7 +19463,7 @@
         </p:blipFill>
         <p:spPr>
           <a:xfrm>
-            <a:off x="7480300" y="3649980"/>
+            <a:off x="7480300" y="3685540"/>
             <a:ext cx="1143000" cy="1143000"/>
           </a:xfrm>
           <a:prstGeom prst="rect">
@@ -19542,7 +19523,7 @@
         </p:blipFill>
         <p:spPr>
           <a:xfrm>
-            <a:off x="408940" y="2326640"/>
+            <a:off x="408940" y="2346960"/>
             <a:ext cx="972820" cy="972820"/>
           </a:xfrm>
           <a:prstGeom prst="rect">
@@ -19604,9 +19585,9 @@
           <p:nvPr/>
         </p:nvCxnSpPr>
         <p:spPr>
-          <a:xfrm flipV="1">
-            <a:off x="1381760" y="2807970"/>
-            <a:ext cx="1099820" cy="5080"/>
+          <a:xfrm>
+            <a:off x="1381760" y="2833370"/>
+            <a:ext cx="1099820" cy="1652"/>
           </a:xfrm>
           <a:prstGeom prst="line">
             <a:avLst/>
@@ -19679,8 +19660,8 @@
         </p:nvSpPr>
         <p:spPr>
           <a:xfrm>
-            <a:off x="4135120" y="355600"/>
-            <a:ext cx="2031325" cy="369332"/>
+            <a:off x="4417309" y="396240"/>
+            <a:ext cx="1282452" cy="369332"/>
           </a:xfrm>
           <a:prstGeom prst="rect">
             <a:avLst/>
@@ -19688,7 +19669,7 @@
           <a:noFill/>
         </p:spPr>
         <p:txBody>
-          <a:bodyPr wrap="none" rtlCol="0">
+          <a:bodyPr wrap="square" rtlCol="0">
             <a:spAutoFit/>
           </a:bodyPr>
           <a:lstStyle/>
@@ -19721,7 +19702,7 @@
         <p:spPr>
           <a:xfrm flipV="1">
             <a:off x="3484880" y="1991360"/>
-            <a:ext cx="1570990" cy="816610"/>
+            <a:ext cx="1570990" cy="843662"/>
           </a:xfrm>
           <a:prstGeom prst="bentConnector2">
             <a:avLst/>
@@ -19742,44 +19723,6 @@
           </a:fontRef>
         </p:style>
       </p:cxnSp>
-      <p:sp>
-        <p:nvSpPr>
-          <p:cNvPr id="19" name="テキスト ボックス 18">
-            <a:extLst>
-              <a:ext uri="{FF2B5EF4-FFF2-40B4-BE49-F238E27FC236}">
-                <a16:creationId xmlns:a16="http://schemas.microsoft.com/office/drawing/2014/main" id="{0DF2C716-25E1-F245-A939-BA14BBEC4884}"/>
-              </a:ext>
-            </a:extLst>
-          </p:cNvPr>
-          <p:cNvSpPr txBox="1"/>
-          <p:nvPr/>
-        </p:nvSpPr>
-        <p:spPr>
-          <a:xfrm>
-            <a:off x="1402080" y="2499360"/>
-            <a:ext cx="1172116" cy="261610"/>
-          </a:xfrm>
-          <a:prstGeom prst="rect">
-            <a:avLst/>
-          </a:prstGeom>
-          <a:noFill/>
-        </p:spPr>
-        <p:txBody>
-          <a:bodyPr wrap="none" rtlCol="0">
-            <a:spAutoFit/>
-          </a:bodyPr>
-          <a:lstStyle/>
-          <a:p>
-            <a:pPr>
-              <a:defRPr/>
-            </a:pPr>
-            <a:r>
-              <a:rPr kumimoji="1" lang="ja-JP" altLang="en-US" sz="1050"/>
-              <a:t>Internet</a:t>
-            </a:r>
-          </a:p>
-        </p:txBody>
-      </p:sp>
       <p:cxnSp>
         <p:nvCxnSpPr>
           <p:cNvPr id="21" name="カギ線コネクタ 20">
@@ -19797,12 +19740,12 @@
         </p:nvCxnSpPr>
         <p:spPr>
           <a:xfrm rot="5400000">
-            <a:off x="3565525" y="2200275"/>
-            <a:ext cx="1699260" cy="1281430"/>
+            <a:off x="3568065" y="2197735"/>
+            <a:ext cx="1694180" cy="1281430"/>
           </a:xfrm>
           <a:prstGeom prst="bentConnector3">
             <a:avLst>
-              <a:gd name="adj1" fmla="val 47608"/>
+              <a:gd name="adj1" fmla="val 50000"/>
             </a:avLst>
           </a:prstGeom>
         </p:spPr>
@@ -19838,12 +19781,12 @@
         </p:nvCxnSpPr>
         <p:spPr>
           <a:xfrm rot="16200000" flipH="1">
-            <a:off x="4276725" y="2770505"/>
-            <a:ext cx="1729740" cy="171450"/>
+            <a:off x="4294505" y="2752725"/>
+            <a:ext cx="1694180" cy="171450"/>
           </a:xfrm>
           <a:prstGeom prst="bentConnector3">
             <a:avLst>
-              <a:gd name="adj1" fmla="val 47651"/>
+              <a:gd name="adj1" fmla="val 50000"/>
             </a:avLst>
           </a:prstGeom>
         </p:spPr>
@@ -19879,12 +19822,12 @@
         </p:nvCxnSpPr>
         <p:spPr>
           <a:xfrm rot="16200000" flipH="1">
-            <a:off x="4972685" y="2074545"/>
-            <a:ext cx="1729740" cy="1563370"/>
+            <a:off x="4990465" y="2056765"/>
+            <a:ext cx="1694180" cy="1563370"/>
           </a:xfrm>
           <a:prstGeom prst="bentConnector3">
             <a:avLst>
-              <a:gd name="adj1" fmla="val 47651"/>
+              <a:gd name="adj1" fmla="val 50000"/>
             </a:avLst>
           </a:prstGeom>
         </p:spPr>
@@ -19920,12 +19863,12 @@
         </p:nvCxnSpPr>
         <p:spPr>
           <a:xfrm rot="16200000" flipH="1">
-            <a:off x="5724525" y="1322705"/>
-            <a:ext cx="1658620" cy="2995930"/>
+            <a:off x="5706745" y="1340485"/>
+            <a:ext cx="1694180" cy="2995930"/>
           </a:xfrm>
           <a:prstGeom prst="bentConnector3">
             <a:avLst>
-              <a:gd name="adj1" fmla="val 49387"/>
+              <a:gd name="adj1" fmla="val 50000"/>
             </a:avLst>
           </a:prstGeom>
         </p:spPr>
@@ -19958,7 +19901,7 @@
         </p:nvSpPr>
         <p:spPr>
           <a:xfrm>
-            <a:off x="3078480" y="4795520"/>
+            <a:off x="3078480" y="4826000"/>
             <a:ext cx="1338828" cy="369332"/>
           </a:xfrm>
           <a:prstGeom prst="rect">
@@ -20066,7 +20009,7 @@
         </p:nvSpPr>
         <p:spPr>
           <a:xfrm>
-            <a:off x="7437120" y="4775200"/>
+            <a:off x="7437120" y="4826000"/>
             <a:ext cx="1338828" cy="369332"/>
           </a:xfrm>
           <a:prstGeom prst="rect">
@@ -20132,6 +20075,42 @@
               <a:t>(InfiniBand, etc.)</a:t>
             </a:r>
             <a:endParaRPr kumimoji="1" lang="en-US" altLang="ja-JP"/>
+          </a:p>
+        </p:txBody>
+      </p:sp>
+      <p:sp>
+        <p:nvSpPr>
+          <p:cNvPr id="2" name="テキスト ボックス 1">
+            <a:extLst>
+              <a:ext uri="{FF2B5EF4-FFF2-40B4-BE49-F238E27FC236}">
+                <a16:creationId xmlns:a16="http://schemas.microsoft.com/office/drawing/2014/main" id="{9B5628B7-09AE-0699-22A8-5468D55D6593}"/>
+              </a:ext>
+            </a:extLst>
+          </p:cNvPr>
+          <p:cNvSpPr txBox="1"/>
+          <p:nvPr/>
+        </p:nvSpPr>
+        <p:spPr>
+          <a:xfrm>
+            <a:off x="1502561" y="2451239"/>
+            <a:ext cx="945067" cy="369332"/>
+          </a:xfrm>
+          <a:prstGeom prst="rect">
+            <a:avLst/>
+          </a:prstGeom>
+          <a:noFill/>
+        </p:spPr>
+        <p:txBody>
+          <a:bodyPr wrap="none" rtlCol="0">
+            <a:spAutoFit/>
+          </a:bodyPr>
+          <a:lstStyle/>
+          <a:p>
+            <a:r>
+              <a:rPr kumimoji="1" lang="en-US" altLang="ja-JP"/>
+              <a:t>Internet</a:t>
+            </a:r>
+            <a:endParaRPr kumimoji="1" lang="ja-JP" altLang="en-US"/>
           </a:p>
         </p:txBody>
       </p:sp>

--- a/site-assets/sources/day2/fig-ja-en.pptx
+++ b/site-assets/sources/day2/fig-ja-en.pptx
@@ -257,7 +257,7 @@
           <a:lstStyle/>
           <a:p>
             <a:fld id="{ACB7CCA1-9DD8-A242-AF72-AF27A73B7972}" type="datetimeFigureOut">
-              <a:t>2026/8/6</a:t>
+              <a:t>2026/8/7</a:t>
             </a:fld>
             <a:endParaRPr kumimoji="1" lang="ja-JP" altLang="en-US"/>
           </a:p>
@@ -433,7 +433,7 @@
           <a:lstStyle/>
           <a:p>
             <a:fld id="{ACB7CCA1-9DD8-A242-AF72-AF27A73B7972}" type="datetimeFigureOut">
-              <a:t>2026/8/6</a:t>
+              <a:t>2026/8/7</a:t>
             </a:fld>
             <a:endParaRPr kumimoji="1" lang="ja-JP" altLang="en-US"/>
           </a:p>
@@ -619,7 +619,7 @@
           <a:lstStyle/>
           <a:p>
             <a:fld id="{ACB7CCA1-9DD8-A242-AF72-AF27A73B7972}" type="datetimeFigureOut">
-              <a:t>2026/8/6</a:t>
+              <a:t>2026/8/7</a:t>
             </a:fld>
             <a:endParaRPr kumimoji="1" lang="ja-JP" altLang="en-US"/>
           </a:p>
@@ -795,7 +795,7 @@
           <a:lstStyle/>
           <a:p>
             <a:fld id="{ACB7CCA1-9DD8-A242-AF72-AF27A73B7972}" type="datetimeFigureOut">
-              <a:t>2026/8/6</a:t>
+              <a:t>2026/8/7</a:t>
             </a:fld>
             <a:endParaRPr kumimoji="1" lang="ja-JP" altLang="en-US"/>
           </a:p>
@@ -1074,7 +1074,7 @@
           <a:lstStyle/>
           <a:p>
             <a:fld id="{ACB7CCA1-9DD8-A242-AF72-AF27A73B7972}" type="datetimeFigureOut">
-              <a:t>2026/8/6</a:t>
+              <a:t>2026/8/7</a:t>
             </a:fld>
             <a:endParaRPr kumimoji="1" lang="ja-JP" altLang="en-US"/>
           </a:p>
@@ -1320,7 +1320,7 @@
           <a:lstStyle/>
           <a:p>
             <a:fld id="{ACB7CCA1-9DD8-A242-AF72-AF27A73B7972}" type="datetimeFigureOut">
-              <a:t>2026/8/6</a:t>
+              <a:t>2026/8/7</a:t>
             </a:fld>
             <a:endParaRPr kumimoji="1" lang="ja-JP" altLang="en-US"/>
           </a:p>
@@ -1775,7 +1775,7 @@
           <a:lstStyle/>
           <a:p>
             <a:fld id="{ACB7CCA1-9DD8-A242-AF72-AF27A73B7972}" type="datetimeFigureOut">
-              <a:t>2026/8/6</a:t>
+              <a:t>2026/8/7</a:t>
             </a:fld>
             <a:endParaRPr kumimoji="1" lang="ja-JP" altLang="en-US"/>
           </a:p>
@@ -1891,7 +1891,7 @@
           <a:lstStyle/>
           <a:p>
             <a:fld id="{ACB7CCA1-9DD8-A242-AF72-AF27A73B7972}" type="datetimeFigureOut">
-              <a:t>2026/8/6</a:t>
+              <a:t>2026/8/7</a:t>
             </a:fld>
             <a:endParaRPr kumimoji="1" lang="ja-JP" altLang="en-US"/>
           </a:p>
@@ -1984,7 +1984,7 @@
           <a:lstStyle/>
           <a:p>
             <a:fld id="{ACB7CCA1-9DD8-A242-AF72-AF27A73B7972}" type="datetimeFigureOut">
-              <a:t>2026/8/6</a:t>
+              <a:t>2026/8/7</a:t>
             </a:fld>
             <a:endParaRPr kumimoji="1" lang="ja-JP" altLang="en-US"/>
           </a:p>
@@ -2304,7 +2304,7 @@
           <a:lstStyle/>
           <a:p>
             <a:fld id="{ACB7CCA1-9DD8-A242-AF72-AF27A73B7972}" type="datetimeFigureOut">
-              <a:t>2026/8/6</a:t>
+              <a:t>2026/8/7</a:t>
             </a:fld>
             <a:endParaRPr kumimoji="1" lang="ja-JP" altLang="en-US"/>
           </a:p>
@@ -2596,7 +2596,7 @@
           <a:lstStyle/>
           <a:p>
             <a:fld id="{ACB7CCA1-9DD8-A242-AF72-AF27A73B7972}" type="datetimeFigureOut">
-              <a:t>2026/8/6</a:t>
+              <a:t>2026/8/7</a:t>
             </a:fld>
             <a:endParaRPr kumimoji="1" lang="ja-JP" altLang="en-US"/>
           </a:p>
@@ -2815,7 +2815,7 @@
           </a:lstStyle>
           <a:p>
             <a:fld id="{ACB7CCA1-9DD8-A242-AF72-AF27A73B7972}" type="datetimeFigureOut">
-              <a:t>2026/8/6</a:t>
+              <a:t>2026/8/7</a:t>
             </a:fld>
             <a:endParaRPr kumimoji="1" lang="ja-JP" altLang="en-US"/>
           </a:p>
@@ -4745,18 +4745,50 @@
         </p:spPr>
         <p:txBody>
           <a:bodyPr wrap="square" rtlCol="0">
-            <a:normAutofit fontScale="62500" lnSpcReduction="20000"/>
+            <a:normAutofit/>
           </a:bodyPr>
           <a:lstStyle/>
           <a:p>
             <a:pPr>
               <a:defRPr/>
             </a:pPr>
-            <a:r>
-              <a:rPr lang="ja-JP" altLang="en-US" dirty="0"/>
-              <a:t>This becomes heavily congested</a:t>
-            </a:r>
             <a:endParaRPr kumimoji="1" lang="ja-JP" altLang="en-US" dirty="0"/>
+          </a:p>
+        </p:txBody>
+      </p:sp>
+      <p:sp>
+        <p:nvSpPr>
+          <p:cNvPr id="3" name="テキスト ボックス 2">
+            <a:extLst>
+              <a:ext uri="{FF2B5EF4-FFF2-40B4-BE49-F238E27FC236}">
+                <a16:creationId xmlns:a16="http://schemas.microsoft.com/office/drawing/2014/main" id="{276494D2-9581-2D5D-D201-0FCC8C80E14F}"/>
+              </a:ext>
+            </a:extLst>
+          </p:cNvPr>
+          <p:cNvSpPr txBox="1"/>
+          <p:nvPr/>
+        </p:nvSpPr>
+        <p:spPr>
+          <a:xfrm>
+            <a:off x="2446758" y="2093070"/>
+            <a:ext cx="2292283" cy="338554"/>
+          </a:xfrm>
+          <a:prstGeom prst="rect">
+            <a:avLst/>
+          </a:prstGeom>
+          <a:noFill/>
+        </p:spPr>
+        <p:txBody>
+          <a:bodyPr wrap="square">
+            <a:spAutoFit/>
+          </a:bodyPr>
+          <a:lstStyle/>
+          <a:p>
+            <a:r>
+              <a:rPr lang="en-US" altLang="ja-JP" sz="1600" dirty="0"/>
+              <a:t>It gets very crowded here</a:t>
+            </a:r>
+            <a:endParaRPr lang="ja-JP" altLang="en-US" sz="1600"/>
           </a:p>
         </p:txBody>
       </p:sp>
@@ -5707,6 +5739,7 @@
         <p:nvCxnSpPr>
           <p:cNvPr id="23" name="直線矢印コネクタ 22"/>
           <p:cNvCxnSpPr>
+            <a:cxnSpLocks/>
             <a:stCxn id="19" idx="3"/>
             <a:endCxn id="18" idx="1"/>
           </p:cNvCxnSpPr>
@@ -5851,27 +5884,13 @@
         </p:spPr>
         <p:txBody>
           <a:bodyPr wrap="square" rtlCol="0">
-            <a:normAutofit fontScale="85000" lnSpcReduction="20000"/>
+            <a:normAutofit/>
           </a:bodyPr>
           <a:lstStyle/>
           <a:p>
             <a:pPr algn="ctr">
               <a:defRPr/>
             </a:pPr>
-            <a:r>
-              <a:rPr kumimoji="1" lang="ja-JP" altLang="en-US" dirty="0"/>
-              <a:t>First go to a hotel near the assignment site</a:t>
-            </a:r>
-            <a:endParaRPr lang="en-US" altLang="ja-JP" dirty="0"/>
-          </a:p>
-          <a:p>
-            <a:pPr algn="ctr">
-              <a:defRPr/>
-            </a:pPr>
-            <a:r>
-              <a:rPr kumimoji="1" lang="ja-JP" altLang="en-US" dirty="0"/>
-              <a:t>(stage-in)</a:t>
-            </a:r>
             <a:endParaRPr lang="en-US" altLang="ja-JP" dirty="0"/>
           </a:p>
         </p:txBody>
@@ -5880,6 +5899,7 @@
         <p:nvCxnSpPr>
           <p:cNvPr id="8" name="直線矢印コネクタ 7"/>
           <p:cNvCxnSpPr>
+            <a:cxnSpLocks/>
             <a:stCxn id="4" idx="3"/>
             <a:endCxn id="6" idx="1"/>
           </p:cNvCxnSpPr>
@@ -5947,88 +5967,6 @@
       </p:pic>
       <p:sp>
         <p:nvSpPr>
-          <p:cNvPr id="10" name="テキスト ボックス 9"/>
-          <p:cNvSpPr txBox="1"/>
-          <p:nvPr/>
-        </p:nvSpPr>
-        <p:spPr>
-          <a:xfrm>
-            <a:off x="4567635" y="299629"/>
-            <a:ext cx="2124299" cy="553998"/>
-          </a:xfrm>
-          <a:prstGeom prst="rect">
-            <a:avLst/>
-          </a:prstGeom>
-          <a:noFill/>
-        </p:spPr>
-        <p:txBody>
-          <a:bodyPr wrap="square" rtlCol="0"/>
-          <a:lstStyle/>
-          <a:p>
-            <a:pPr algn="ctr">
-              <a:defRPr sz="1550"/>
-            </a:pPr>
-            <a:r>
-              <a:rPr lang="ja-JP" altLang="en-US" sz="1550" dirty="0"/>
-              <a:t>Hotel</a:t>
-            </a:r>
-            <a:endParaRPr lang="en-US" altLang="ja-JP" dirty="0"/>
-          </a:p>
-          <a:p>
-            <a:pPr algn="ctr">
-              <a:defRPr sz="1550"/>
-            </a:pPr>
-            <a:r>
-              <a:rPr lang="ja-JP" altLang="en-US" sz="1550" dirty="0"/>
-              <a:t>(local file system)</a:t>
-            </a:r>
-            <a:endParaRPr lang="en-US" altLang="ja-JP" dirty="0"/>
-          </a:p>
-        </p:txBody>
-      </p:sp>
-      <p:sp>
-        <p:nvSpPr>
-          <p:cNvPr id="14" name="テキスト ボックス 13"/>
-          <p:cNvSpPr txBox="1"/>
-          <p:nvPr/>
-        </p:nvSpPr>
-        <p:spPr>
-          <a:xfrm>
-            <a:off x="1460938" y="299629"/>
-            <a:ext cx="2278188" cy="553998"/>
-          </a:xfrm>
-          <a:prstGeom prst="rect">
-            <a:avLst/>
-          </a:prstGeom>
-          <a:noFill/>
-        </p:spPr>
-        <p:txBody>
-          <a:bodyPr wrap="square" rtlCol="0"/>
-          <a:lstStyle/>
-          <a:p>
-            <a:pPr algn="ctr">
-              <a:defRPr sz="1550"/>
-            </a:pPr>
-            <a:r>
-              <a:rPr lang="ja-JP" altLang="en-US" sz="1550" dirty="0"/>
-              <a:t>Home</a:t>
-            </a:r>
-            <a:endParaRPr lang="en-US" altLang="ja-JP" dirty="0"/>
-          </a:p>
-          <a:p>
-            <a:pPr algn="ctr">
-              <a:defRPr sz="1550"/>
-            </a:pPr>
-            <a:r>
-              <a:rPr lang="ja-JP" altLang="en-US" sz="1550" dirty="0"/>
-              <a:t>(global file system)</a:t>
-            </a:r>
-            <a:endParaRPr lang="en-US" altLang="ja-JP" dirty="0"/>
-          </a:p>
-        </p:txBody>
-      </p:sp>
-      <p:sp>
-        <p:nvSpPr>
           <p:cNvPr id="16" name="テキスト ボックス 15"/>
           <p:cNvSpPr txBox="1"/>
           <p:nvPr/>
@@ -6045,27 +5983,13 @@
         </p:spPr>
         <p:txBody>
           <a:bodyPr wrap="square" rtlCol="0">
-            <a:normAutofit fontScale="55000" lnSpcReduction="20000"/>
+            <a:normAutofit/>
           </a:bodyPr>
           <a:lstStyle/>
           <a:p>
             <a:pPr algn="ctr">
               <a:defRPr/>
             </a:pPr>
-            <a:r>
-              <a:rPr lang="ja-JP" altLang="en-US" dirty="0"/>
-              <a:t>Assignment site</a:t>
-            </a:r>
-            <a:endParaRPr lang="en-US" altLang="ja-JP" dirty="0"/>
-          </a:p>
-          <a:p>
-            <a:pPr algn="ctr">
-              <a:defRPr/>
-            </a:pPr>
-            <a:r>
-              <a:rPr lang="ja-JP" altLang="en-US" dirty="0"/>
-              <a:t>(compute node)</a:t>
-            </a:r>
             <a:endParaRPr lang="en-US" altLang="ja-JP" dirty="0"/>
           </a:p>
         </p:txBody>
@@ -6220,49 +6144,6 @@
           </a:prstGeom>
         </p:spPr>
       </p:pic>
-      <p:sp>
-        <p:nvSpPr>
-          <p:cNvPr id="28" name="テキスト ボックス 27"/>
-          <p:cNvSpPr txBox="1"/>
-          <p:nvPr/>
-        </p:nvSpPr>
-        <p:spPr>
-          <a:xfrm>
-            <a:off x="5681532" y="4240828"/>
-            <a:ext cx="3185487" cy="553998"/>
-          </a:xfrm>
-          <a:prstGeom prst="rect">
-            <a:avLst/>
-          </a:prstGeom>
-          <a:noFill/>
-        </p:spPr>
-        <p:txBody>
-          <a:bodyPr wrap="square" rtlCol="0">
-            <a:normAutofit fontScale="62500" lnSpcReduction="20000"/>
-          </a:bodyPr>
-          <a:lstStyle/>
-          <a:p>
-            <a:pPr algn="ctr">
-              <a:defRPr/>
-            </a:pPr>
-            <a:r>
-              <a:rPr kumimoji="1" lang="ja-JP" altLang="en-US" dirty="0"/>
-              <a:t>During the assignment, travel only between the hotel and office</a:t>
-            </a:r>
-            <a:endParaRPr kumimoji="1" lang="en-US" altLang="ja-JP" dirty="0"/>
-          </a:p>
-          <a:p>
-            <a:pPr algn="ctr">
-              <a:defRPr/>
-            </a:pPr>
-            <a:r>
-              <a:rPr kumimoji="1" lang="ja-JP" altLang="en-US" dirty="0"/>
-              <a:t>(access only local files)</a:t>
-            </a:r>
-            <a:endParaRPr kumimoji="1" lang="en-US" altLang="ja-JP" dirty="0"/>
-          </a:p>
-        </p:txBody>
-      </p:sp>
       <p:pic>
         <p:nvPicPr>
           <p:cNvPr id="29" name="図 28"/>
@@ -6357,6 +6238,7 @@
         <p:nvCxnSpPr>
           <p:cNvPr id="32" name="直線矢印コネクタ 31"/>
           <p:cNvCxnSpPr>
+            <a:cxnSpLocks/>
             <a:stCxn id="31" idx="1"/>
             <a:endCxn id="29" idx="3"/>
           </p:cNvCxnSpPr>
@@ -6424,49 +6306,6 @@
       </p:pic>
       <p:sp>
         <p:nvSpPr>
-          <p:cNvPr id="35" name="テキスト ボックス 34"/>
-          <p:cNvSpPr txBox="1"/>
-          <p:nvPr/>
-        </p:nvSpPr>
-        <p:spPr>
-          <a:xfrm>
-            <a:off x="2781237" y="6155988"/>
-            <a:ext cx="2954655" cy="646331"/>
-          </a:xfrm>
-          <a:prstGeom prst="rect">
-            <a:avLst/>
-          </a:prstGeom>
-          <a:noFill/>
-        </p:spPr>
-        <p:txBody>
-          <a:bodyPr wrap="square" rtlCol="0">
-            <a:normAutofit fontScale="85000" lnSpcReduction="20000"/>
-          </a:bodyPr>
-          <a:lstStyle/>
-          <a:p>
-            <a:pPr algn="ctr">
-              <a:defRPr/>
-            </a:pPr>
-            <a:r>
-              <a:rPr lang="ja-JP" altLang="en-US" dirty="0"/>
-              <a:t>Return home when the assignment ends</a:t>
-            </a:r>
-            <a:endParaRPr lang="en-US" altLang="ja-JP" dirty="0"/>
-          </a:p>
-          <a:p>
-            <a:pPr algn="ctr">
-              <a:defRPr/>
-            </a:pPr>
-            <a:r>
-              <a:rPr lang="ja-JP" altLang="en-US" dirty="0"/>
-              <a:t>(stage-out)</a:t>
-            </a:r>
-            <a:endParaRPr lang="en-US" altLang="ja-JP" dirty="0"/>
-          </a:p>
-        </p:txBody>
-      </p:sp>
-      <p:sp>
-        <p:nvSpPr>
           <p:cNvPr id="36" name="テキスト ボックス 35"/>
           <p:cNvSpPr txBox="1"/>
           <p:nvPr/>
@@ -6555,6 +6394,258 @@
             <a:r>
               <a:rPr kumimoji="1" lang="ja-JP" altLang="en-US" dirty="0"/>
               <a:t>At job end</a:t>
+            </a:r>
+          </a:p>
+        </p:txBody>
+      </p:sp>
+      <p:sp>
+        <p:nvSpPr>
+          <p:cNvPr id="3" name="テキスト ボックス 2">
+            <a:extLst>
+              <a:ext uri="{FF2B5EF4-FFF2-40B4-BE49-F238E27FC236}">
+                <a16:creationId xmlns:a16="http://schemas.microsoft.com/office/drawing/2014/main" id="{A0B4EDC7-AFEE-1B9D-95AE-C83851A9FE05}"/>
+              </a:ext>
+            </a:extLst>
+          </p:cNvPr>
+          <p:cNvSpPr txBox="1"/>
+          <p:nvPr/>
+        </p:nvSpPr>
+        <p:spPr>
+          <a:xfrm>
+            <a:off x="2020154" y="2111831"/>
+            <a:ext cx="4302073" cy="646331"/>
+          </a:xfrm>
+          <a:prstGeom prst="rect">
+            <a:avLst/>
+          </a:prstGeom>
+          <a:noFill/>
+        </p:spPr>
+        <p:txBody>
+          <a:bodyPr wrap="square">
+            <a:spAutoFit/>
+          </a:bodyPr>
+          <a:lstStyle/>
+          <a:p>
+            <a:r>
+              <a:rPr lang="ja-JP" altLang="en-US"/>
+              <a:t>First go to a hotel near the assignment site</a:t>
+            </a:r>
+          </a:p>
+          <a:p>
+            <a:r>
+              <a:rPr lang="ja-JP" altLang="en-US"/>
+              <a:t>(stage-in)</a:t>
+            </a:r>
+          </a:p>
+        </p:txBody>
+      </p:sp>
+      <p:sp>
+        <p:nvSpPr>
+          <p:cNvPr id="12" name="テキスト ボックス 11">
+            <a:extLst>
+              <a:ext uri="{FF2B5EF4-FFF2-40B4-BE49-F238E27FC236}">
+                <a16:creationId xmlns:a16="http://schemas.microsoft.com/office/drawing/2014/main" id="{1FC46A89-AD6B-7F0E-C9C5-3EEEC1AFDF78}"/>
+              </a:ext>
+            </a:extLst>
+          </p:cNvPr>
+          <p:cNvSpPr txBox="1"/>
+          <p:nvPr/>
+        </p:nvSpPr>
+        <p:spPr>
+          <a:xfrm>
+            <a:off x="2246040" y="6133849"/>
+            <a:ext cx="4076187" cy="646331"/>
+          </a:xfrm>
+          <a:prstGeom prst="rect">
+            <a:avLst/>
+          </a:prstGeom>
+          <a:noFill/>
+        </p:spPr>
+        <p:txBody>
+          <a:bodyPr wrap="square">
+            <a:spAutoFit/>
+          </a:bodyPr>
+          <a:lstStyle/>
+          <a:p>
+            <a:r>
+              <a:rPr lang="ja-JP" altLang="en-US"/>
+              <a:t>Return home when the assignment ends</a:t>
+            </a:r>
+          </a:p>
+          <a:p>
+            <a:r>
+              <a:rPr lang="ja-JP" altLang="en-US"/>
+              <a:t>(stage-out)</a:t>
+            </a:r>
+          </a:p>
+        </p:txBody>
+      </p:sp>
+      <p:sp>
+        <p:nvSpPr>
+          <p:cNvPr id="15" name="テキスト ボックス 14">
+            <a:extLst>
+              <a:ext uri="{FF2B5EF4-FFF2-40B4-BE49-F238E27FC236}">
+                <a16:creationId xmlns:a16="http://schemas.microsoft.com/office/drawing/2014/main" id="{37F3DCCF-7D21-DD0F-52FD-370FBD93A981}"/>
+              </a:ext>
+            </a:extLst>
+          </p:cNvPr>
+          <p:cNvSpPr txBox="1"/>
+          <p:nvPr/>
+        </p:nvSpPr>
+        <p:spPr>
+          <a:xfrm>
+            <a:off x="5629784" y="4125899"/>
+            <a:ext cx="3608877" cy="923330"/>
+          </a:xfrm>
+          <a:prstGeom prst="rect">
+            <a:avLst/>
+          </a:prstGeom>
+          <a:noFill/>
+        </p:spPr>
+        <p:txBody>
+          <a:bodyPr wrap="square">
+            <a:spAutoFit/>
+          </a:bodyPr>
+          <a:lstStyle/>
+          <a:p>
+            <a:r>
+              <a:rPr lang="ja-JP" altLang="en-US"/>
+              <a:t>During the assignment, travel only between the hotel and office</a:t>
+            </a:r>
+          </a:p>
+          <a:p>
+            <a:r>
+              <a:rPr lang="ja-JP" altLang="en-US"/>
+              <a:t>(access only local files)</a:t>
+            </a:r>
+          </a:p>
+        </p:txBody>
+      </p:sp>
+      <p:sp>
+        <p:nvSpPr>
+          <p:cNvPr id="21" name="テキスト ボックス 20">
+            <a:extLst>
+              <a:ext uri="{FF2B5EF4-FFF2-40B4-BE49-F238E27FC236}">
+                <a16:creationId xmlns:a16="http://schemas.microsoft.com/office/drawing/2014/main" id="{EE944E88-C3F9-5B49-7D42-1EFC29FA3072}"/>
+              </a:ext>
+            </a:extLst>
+          </p:cNvPr>
+          <p:cNvSpPr txBox="1"/>
+          <p:nvPr/>
+        </p:nvSpPr>
+        <p:spPr>
+          <a:xfrm>
+            <a:off x="7974930" y="233619"/>
+            <a:ext cx="1715420" cy="646331"/>
+          </a:xfrm>
+          <a:prstGeom prst="rect">
+            <a:avLst/>
+          </a:prstGeom>
+          <a:noFill/>
+        </p:spPr>
+        <p:txBody>
+          <a:bodyPr wrap="square">
+            <a:spAutoFit/>
+          </a:bodyPr>
+          <a:lstStyle/>
+          <a:p>
+            <a:pPr algn="ctr"/>
+            <a:r>
+              <a:rPr lang="ja-JP" altLang="en-US"/>
+              <a:t>Assignment site</a:t>
+            </a:r>
+          </a:p>
+          <a:p>
+            <a:pPr algn="ctr"/>
+            <a:r>
+              <a:rPr lang="ja-JP" altLang="en-US"/>
+              <a:t>(compute node)</a:t>
+            </a:r>
+          </a:p>
+        </p:txBody>
+      </p:sp>
+      <p:sp>
+        <p:nvSpPr>
+          <p:cNvPr id="25" name="テキスト ボックス 24">
+            <a:extLst>
+              <a:ext uri="{FF2B5EF4-FFF2-40B4-BE49-F238E27FC236}">
+                <a16:creationId xmlns:a16="http://schemas.microsoft.com/office/drawing/2014/main" id="{06C366B5-C1C7-7738-5664-E48F811CCECD}"/>
+              </a:ext>
+            </a:extLst>
+          </p:cNvPr>
+          <p:cNvSpPr txBox="1"/>
+          <p:nvPr/>
+        </p:nvSpPr>
+        <p:spPr>
+          <a:xfrm>
+            <a:off x="4675242" y="233619"/>
+            <a:ext cx="1933942" cy="646331"/>
+          </a:xfrm>
+          <a:prstGeom prst="rect">
+            <a:avLst/>
+          </a:prstGeom>
+          <a:noFill/>
+        </p:spPr>
+        <p:txBody>
+          <a:bodyPr wrap="square">
+            <a:spAutoFit/>
+          </a:bodyPr>
+          <a:lstStyle/>
+          <a:p>
+            <a:pPr algn="ctr"/>
+            <a:r>
+              <a:rPr lang="ja-JP" altLang="en-US"/>
+              <a:t>Hotel</a:t>
+            </a:r>
+          </a:p>
+          <a:p>
+            <a:pPr algn="ctr"/>
+            <a:r>
+              <a:rPr lang="ja-JP" altLang="en-US"/>
+              <a:t>(local file system)</a:t>
+            </a:r>
+          </a:p>
+        </p:txBody>
+      </p:sp>
+      <p:sp>
+        <p:nvSpPr>
+          <p:cNvPr id="40" name="テキスト ボックス 39">
+            <a:extLst>
+              <a:ext uri="{FF2B5EF4-FFF2-40B4-BE49-F238E27FC236}">
+                <a16:creationId xmlns:a16="http://schemas.microsoft.com/office/drawing/2014/main" id="{EBEC7069-216C-DA70-41A2-90D525BC98E6}"/>
+              </a:ext>
+            </a:extLst>
+          </p:cNvPr>
+          <p:cNvSpPr txBox="1"/>
+          <p:nvPr/>
+        </p:nvSpPr>
+        <p:spPr>
+          <a:xfrm>
+            <a:off x="1807215" y="233619"/>
+            <a:ext cx="2051970" cy="646331"/>
+          </a:xfrm>
+          <a:prstGeom prst="rect">
+            <a:avLst/>
+          </a:prstGeom>
+          <a:noFill/>
+        </p:spPr>
+        <p:txBody>
+          <a:bodyPr wrap="square">
+            <a:spAutoFit/>
+          </a:bodyPr>
+          <a:lstStyle/>
+          <a:p>
+            <a:pPr algn="ctr"/>
+            <a:r>
+              <a:rPr lang="ja-JP" altLang="en-US"/>
+              <a:t>Home</a:t>
+            </a:r>
+          </a:p>
+          <a:p>
+            <a:pPr algn="ctr"/>
+            <a:r>
+              <a:rPr lang="ja-JP" altLang="en-US"/>
+              <a:t>(global file system)</a:t>
             </a:r>
           </a:p>
         </p:txBody>
@@ -10646,44 +10737,6 @@
       </p:sp>
       <p:sp>
         <p:nvSpPr>
-          <p:cNvPr id="79" name="テキスト ボックス 78">
-            <a:extLst>
-              <a:ext uri="{FF2B5EF4-FFF2-40B4-BE49-F238E27FC236}">
-                <a16:creationId xmlns:a16="http://schemas.microsoft.com/office/drawing/2014/main" id="{E0D30EA2-F37C-4543-836A-23954F8195F8}"/>
-              </a:ext>
-            </a:extLst>
-          </p:cNvPr>
-          <p:cNvSpPr txBox="1"/>
-          <p:nvPr/>
-        </p:nvSpPr>
-        <p:spPr>
-          <a:xfrm>
-            <a:off x="2936776" y="3068960"/>
-            <a:ext cx="748923" cy="261610"/>
-          </a:xfrm>
-          <a:prstGeom prst="rect">
-            <a:avLst/>
-          </a:prstGeom>
-          <a:noFill/>
-        </p:spPr>
-        <p:txBody>
-          <a:bodyPr wrap="none" rtlCol="0">
-            <a:spAutoFit/>
-          </a:bodyPr>
-          <a:lstStyle/>
-          <a:p>
-            <a:pPr>
-              <a:defRPr/>
-            </a:pPr>
-            <a:r>
-              <a:rPr kumimoji="1" lang="ja-JP" altLang="en-US" sz="1100"/>
-              <a:t>Stamina</a:t>
-            </a:r>
-          </a:p>
-        </p:txBody>
-      </p:sp>
-      <p:sp>
-        <p:nvSpPr>
           <p:cNvPr id="80" name="正方形/長方形 79">
             <a:extLst>
               <a:ext uri="{FF2B5EF4-FFF2-40B4-BE49-F238E27FC236}">
@@ -10728,44 +10781,6 @@
           <a:p>
             <a:pPr algn="ctr"/>
             <a:endParaRPr kumimoji="1" lang="ja-JP" altLang="en-US"/>
-          </a:p>
-        </p:txBody>
-      </p:sp>
-      <p:sp>
-        <p:nvSpPr>
-          <p:cNvPr id="81" name="テキスト ボックス 80">
-            <a:extLst>
-              <a:ext uri="{FF2B5EF4-FFF2-40B4-BE49-F238E27FC236}">
-                <a16:creationId xmlns:a16="http://schemas.microsoft.com/office/drawing/2014/main" id="{FA9FC9F8-34C4-F44D-B136-2B04E3F9D78D}"/>
-              </a:ext>
-            </a:extLst>
-          </p:cNvPr>
-          <p:cNvSpPr txBox="1"/>
-          <p:nvPr/>
-        </p:nvSpPr>
-        <p:spPr>
-          <a:xfrm>
-            <a:off x="200472" y="3789040"/>
-            <a:ext cx="748923" cy="261610"/>
-          </a:xfrm>
-          <a:prstGeom prst="rect">
-            <a:avLst/>
-          </a:prstGeom>
-          <a:noFill/>
-        </p:spPr>
-        <p:txBody>
-          <a:bodyPr wrap="none" rtlCol="0">
-            <a:spAutoFit/>
-          </a:bodyPr>
-          <a:lstStyle/>
-          <a:p>
-            <a:pPr>
-              <a:defRPr/>
-            </a:pPr>
-            <a:r>
-              <a:rPr kumimoji="1" lang="ja-JP" altLang="en-US" sz="1100"/>
-              <a:t>Stamina</a:t>
-            </a:r>
           </a:p>
         </p:txBody>
       </p:sp>
@@ -11947,44 +11962,6 @@
       </p:sp>
       <p:sp>
         <p:nvSpPr>
-          <p:cNvPr id="107" name="テキスト ボックス 106">
-            <a:extLst>
-              <a:ext uri="{FF2B5EF4-FFF2-40B4-BE49-F238E27FC236}">
-                <a16:creationId xmlns:a16="http://schemas.microsoft.com/office/drawing/2014/main" id="{6F9D4F37-CEE9-A849-956D-EAE68200ABC7}"/>
-              </a:ext>
-            </a:extLst>
-          </p:cNvPr>
-          <p:cNvSpPr txBox="1"/>
-          <p:nvPr/>
-        </p:nvSpPr>
-        <p:spPr>
-          <a:xfrm>
-            <a:off x="8193360" y="3789040"/>
-            <a:ext cx="748923" cy="261610"/>
-          </a:xfrm>
-          <a:prstGeom prst="rect">
-            <a:avLst/>
-          </a:prstGeom>
-          <a:noFill/>
-        </p:spPr>
-        <p:txBody>
-          <a:bodyPr wrap="none" rtlCol="0">
-            <a:spAutoFit/>
-          </a:bodyPr>
-          <a:lstStyle/>
-          <a:p>
-            <a:pPr>
-              <a:defRPr/>
-            </a:pPr>
-            <a:r>
-              <a:rPr kumimoji="1" lang="ja-JP" altLang="en-US" sz="1100"/>
-              <a:t>Stamina</a:t>
-            </a:r>
-          </a:p>
-        </p:txBody>
-      </p:sp>
-      <p:sp>
-        <p:nvSpPr>
           <p:cNvPr id="108" name="正方形/長方形 107">
             <a:extLst>
               <a:ext uri="{FF2B5EF4-FFF2-40B4-BE49-F238E27FC236}">
@@ -12029,44 +12006,6 @@
           <a:p>
             <a:pPr algn="ctr"/>
             <a:endParaRPr kumimoji="1" lang="ja-JP" altLang="en-US"/>
-          </a:p>
-        </p:txBody>
-      </p:sp>
-      <p:sp>
-        <p:nvSpPr>
-          <p:cNvPr id="109" name="テキスト ボックス 108">
-            <a:extLst>
-              <a:ext uri="{FF2B5EF4-FFF2-40B4-BE49-F238E27FC236}">
-                <a16:creationId xmlns:a16="http://schemas.microsoft.com/office/drawing/2014/main" id="{805E4C14-6B9A-174A-84A2-911764DE564D}"/>
-              </a:ext>
-            </a:extLst>
-          </p:cNvPr>
-          <p:cNvSpPr txBox="1"/>
-          <p:nvPr/>
-        </p:nvSpPr>
-        <p:spPr>
-          <a:xfrm>
-            <a:off x="5457056" y="3789040"/>
-            <a:ext cx="748923" cy="261610"/>
-          </a:xfrm>
-          <a:prstGeom prst="rect">
-            <a:avLst/>
-          </a:prstGeom>
-          <a:noFill/>
-        </p:spPr>
-        <p:txBody>
-          <a:bodyPr wrap="none" rtlCol="0">
-            <a:spAutoFit/>
-          </a:bodyPr>
-          <a:lstStyle/>
-          <a:p>
-            <a:pPr>
-              <a:defRPr/>
-            </a:pPr>
-            <a:r>
-              <a:rPr kumimoji="1" lang="ja-JP" altLang="en-US" sz="1100"/>
-              <a:t>Stamina</a:t>
-            </a:r>
           </a:p>
         </p:txBody>
       </p:sp>
@@ -12211,6 +12150,146 @@
           </a:p>
         </p:txBody>
       </p:sp>
+      <p:sp>
+        <p:nvSpPr>
+          <p:cNvPr id="11" name="テキスト ボックス 10">
+            <a:extLst>
+              <a:ext uri="{FF2B5EF4-FFF2-40B4-BE49-F238E27FC236}">
+                <a16:creationId xmlns:a16="http://schemas.microsoft.com/office/drawing/2014/main" id="{6ECD49BE-78C9-EFED-BE09-7B9ADF4167DD}"/>
+              </a:ext>
+            </a:extLst>
+          </p:cNvPr>
+          <p:cNvSpPr txBox="1"/>
+          <p:nvPr/>
+        </p:nvSpPr>
+        <p:spPr>
+          <a:xfrm>
+            <a:off x="5498183" y="4252446"/>
+            <a:ext cx="1080120" cy="369332"/>
+          </a:xfrm>
+          <a:prstGeom prst="rect">
+            <a:avLst/>
+          </a:prstGeom>
+          <a:noFill/>
+        </p:spPr>
+        <p:txBody>
+          <a:bodyPr wrap="square">
+            <a:spAutoFit/>
+          </a:bodyPr>
+          <a:lstStyle/>
+          <a:p>
+            <a:r>
+              <a:rPr lang="ja-JP" altLang="en-US"/>
+              <a:t>Stamina</a:t>
+            </a:r>
+          </a:p>
+        </p:txBody>
+      </p:sp>
+      <p:sp>
+        <p:nvSpPr>
+          <p:cNvPr id="12" name="テキスト ボックス 11">
+            <a:extLst>
+              <a:ext uri="{FF2B5EF4-FFF2-40B4-BE49-F238E27FC236}">
+                <a16:creationId xmlns:a16="http://schemas.microsoft.com/office/drawing/2014/main" id="{FC31F9A6-66B8-D4E0-3C94-783D9093D1EE}"/>
+              </a:ext>
+            </a:extLst>
+          </p:cNvPr>
+          <p:cNvSpPr txBox="1"/>
+          <p:nvPr/>
+        </p:nvSpPr>
+        <p:spPr>
+          <a:xfrm>
+            <a:off x="3040380" y="3489329"/>
+            <a:ext cx="1080120" cy="369332"/>
+          </a:xfrm>
+          <a:prstGeom prst="rect">
+            <a:avLst/>
+          </a:prstGeom>
+          <a:noFill/>
+        </p:spPr>
+        <p:txBody>
+          <a:bodyPr wrap="square">
+            <a:spAutoFit/>
+          </a:bodyPr>
+          <a:lstStyle/>
+          <a:p>
+            <a:r>
+              <a:rPr lang="ja-JP" altLang="en-US"/>
+              <a:t>Stamina</a:t>
+            </a:r>
+          </a:p>
+        </p:txBody>
+      </p:sp>
+      <p:sp>
+        <p:nvSpPr>
+          <p:cNvPr id="13" name="テキスト ボックス 12">
+            <a:extLst>
+              <a:ext uri="{FF2B5EF4-FFF2-40B4-BE49-F238E27FC236}">
+                <a16:creationId xmlns:a16="http://schemas.microsoft.com/office/drawing/2014/main" id="{3FFDEFB3-3143-E152-A98F-3E76ECB52849}"/>
+              </a:ext>
+            </a:extLst>
+          </p:cNvPr>
+          <p:cNvSpPr txBox="1"/>
+          <p:nvPr/>
+        </p:nvSpPr>
+        <p:spPr>
+          <a:xfrm>
+            <a:off x="308174" y="4192572"/>
+            <a:ext cx="1080120" cy="369332"/>
+          </a:xfrm>
+          <a:prstGeom prst="rect">
+            <a:avLst/>
+          </a:prstGeom>
+          <a:noFill/>
+        </p:spPr>
+        <p:txBody>
+          <a:bodyPr wrap="square">
+            <a:spAutoFit/>
+          </a:bodyPr>
+          <a:lstStyle/>
+          <a:p>
+            <a:r>
+              <a:rPr lang="ja-JP" altLang="en-US"/>
+              <a:t>Stamina</a:t>
+            </a:r>
+          </a:p>
+        </p:txBody>
+      </p:sp>
+      <p:sp>
+        <p:nvSpPr>
+          <p:cNvPr id="14" name="テキスト ボックス 13">
+            <a:extLst>
+              <a:ext uri="{FF2B5EF4-FFF2-40B4-BE49-F238E27FC236}">
+                <a16:creationId xmlns:a16="http://schemas.microsoft.com/office/drawing/2014/main" id="{DA1425D5-A8AC-E345-280B-7F699EEF2F96}"/>
+              </a:ext>
+            </a:extLst>
+          </p:cNvPr>
+          <p:cNvSpPr txBox="1"/>
+          <p:nvPr/>
+        </p:nvSpPr>
+        <p:spPr>
+          <a:xfrm>
+            <a:off x="8368900" y="4218701"/>
+            <a:ext cx="1080120" cy="369332"/>
+          </a:xfrm>
+          <a:prstGeom prst="rect">
+            <a:avLst/>
+          </a:prstGeom>
+          <a:noFill/>
+        </p:spPr>
+        <p:txBody>
+          <a:bodyPr wrap="square">
+            <a:spAutoFit/>
+          </a:bodyPr>
+          <a:lstStyle/>
+          <a:p>
+            <a:r>
+              <a:rPr lang="ja-JP" altLang="en-US"/>
+              <a:t>Stamina</a:t>
+            </a:r>
+          </a:p>
+        </p:txBody>
+      </p:sp>
     </p:spTree>
     <p:extLst>
       <p:ext uri="{BB962C8B-B14F-4D97-AF65-F5344CB8AC3E}">
@@ -14560,7 +14639,7 @@
               <a:defRPr/>
             </a:pPr>
             <a:r>
-              <a:rPr kumimoji="1" lang="en-US" altLang="ja-JP" sz="1200"/>
+              <a:rPr kumimoji="1" lang="en-US" altLang="ja-JP" sz="1200" dirty="0"/>
               <a:t>1-node job</a:t>
             </a:r>
           </a:p>
@@ -14569,7 +14648,7 @@
               <a:defRPr/>
             </a:pPr>
             <a:r>
-              <a:rPr kumimoji="1" lang="en-US" altLang="ja-JP" sz="1200"/>
+              <a:rPr kumimoji="1" lang="en-US" altLang="ja-JP" sz="1200" dirty="0"/>
               <a:t>(running)</a:t>
             </a:r>
           </a:p>
@@ -14641,17 +14720,14 @@
         </p:spPr>
         <p:txBody>
           <a:bodyPr wrap="square" rtlCol="0">
-            <a:normAutofit fontScale="55000" lnSpcReduction="20000"/>
+            <a:normAutofit fontScale="92500" lnSpcReduction="20000"/>
           </a:bodyPr>
           <a:lstStyle/>
           <a:p>
             <a:pPr>
               <a:defRPr/>
             </a:pPr>
-            <a:r>
-              <a:rPr kumimoji="1" lang="ja-JP" altLang="en-US" sz="1400"/>
-              <a:t>Current time</a:t>
-            </a:r>
+            <a:endParaRPr kumimoji="1" lang="ja-JP" altLang="en-US" sz="1400"/>
           </a:p>
         </p:txBody>
       </p:sp>
@@ -14697,44 +14773,6 @@
           </a:fontRef>
         </p:style>
       </p:cxnSp>
-      <p:sp>
-        <p:nvSpPr>
-          <p:cNvPr id="20" name="テキスト ボックス 19">
-            <a:extLst>
-              <a:ext uri="{FF2B5EF4-FFF2-40B4-BE49-F238E27FC236}">
-                <a16:creationId xmlns:a16="http://schemas.microsoft.com/office/drawing/2014/main" id="{919A85BC-3808-A540-A00E-C2FBA732F8D6}"/>
-              </a:ext>
-            </a:extLst>
-          </p:cNvPr>
-          <p:cNvSpPr txBox="1"/>
-          <p:nvPr/>
-        </p:nvSpPr>
-        <p:spPr>
-          <a:xfrm>
-            <a:off x="2407346" y="187767"/>
-            <a:ext cx="1085270" cy="264700"/>
-          </a:xfrm>
-          <a:prstGeom prst="rect">
-            <a:avLst/>
-          </a:prstGeom>
-          <a:noFill/>
-        </p:spPr>
-        <p:txBody>
-          <a:bodyPr wrap="square" rtlCol="0">
-            <a:normAutofit fontScale="55000" lnSpcReduction="20000"/>
-          </a:bodyPr>
-          <a:lstStyle/>
-          <a:p>
-            <a:pPr>
-              <a:defRPr/>
-            </a:pPr>
-            <a:r>
-              <a:rPr kumimoji="1" lang="ja-JP" altLang="en-US" sz="1400"/>
-              <a:t>Estimated end time</a:t>
-            </a:r>
-          </a:p>
-        </p:txBody>
-      </p:sp>
       <p:sp>
         <p:nvSpPr>
           <p:cNvPr id="22" name="正方形/長方形 21">
@@ -14850,10 +14888,10 @@
       </p:sp>
       <p:sp>
         <p:nvSpPr>
-          <p:cNvPr id="24" name="テキスト ボックス 23">
-            <a:extLst>
-              <a:ext uri="{FF2B5EF4-FFF2-40B4-BE49-F238E27FC236}">
-                <a16:creationId xmlns:a16="http://schemas.microsoft.com/office/drawing/2014/main" id="{AD36A392-9E30-694D-B9B8-666E7F7CFDF9}"/>
+          <p:cNvPr id="25" name="テキスト ボックス 24">
+            <a:extLst>
+              <a:ext uri="{FF2B5EF4-FFF2-40B4-BE49-F238E27FC236}">
+                <a16:creationId xmlns:a16="http://schemas.microsoft.com/office/drawing/2014/main" id="{43BC8232-0CA5-594A-A53B-E7F12834EF48}"/>
               </a:ext>
             </a:extLst>
           </p:cNvPr>
@@ -14862,7 +14900,7 @@
         </p:nvSpPr>
         <p:spPr>
           <a:xfrm>
-            <a:off x="1808072" y="2122926"/>
+            <a:off x="1799334" y="1537480"/>
             <a:ext cx="952921" cy="317640"/>
           </a:xfrm>
           <a:prstGeom prst="rect">
@@ -14872,95 +14910,13 @@
         </p:spPr>
         <p:txBody>
           <a:bodyPr wrap="square" rtlCol="0">
-            <a:normAutofit fontScale="55000" lnSpcReduction="20000"/>
+            <a:normAutofit fontScale="92500" lnSpcReduction="20000"/>
           </a:bodyPr>
           <a:lstStyle/>
           <a:p>
             <a:pPr>
               <a:defRPr/>
             </a:pPr>
-            <a:r>
-              <a:rPr lang="ja-JP" altLang="en-US"/>
-              <a:t>Free resources</a:t>
-            </a:r>
-            <a:endParaRPr kumimoji="1" lang="ja-JP" altLang="en-US"/>
-          </a:p>
-        </p:txBody>
-      </p:sp>
-      <p:sp>
-        <p:nvSpPr>
-          <p:cNvPr id="25" name="テキスト ボックス 24">
-            <a:extLst>
-              <a:ext uri="{FF2B5EF4-FFF2-40B4-BE49-F238E27FC236}">
-                <a16:creationId xmlns:a16="http://schemas.microsoft.com/office/drawing/2014/main" id="{43BC8232-0CA5-594A-A53B-E7F12834EF48}"/>
-              </a:ext>
-            </a:extLst>
-          </p:cNvPr>
-          <p:cNvSpPr txBox="1"/>
-          <p:nvPr/>
-        </p:nvSpPr>
-        <p:spPr>
-          <a:xfrm>
-            <a:off x="1799334" y="1537480"/>
-            <a:ext cx="952921" cy="317640"/>
-          </a:xfrm>
-          <a:prstGeom prst="rect">
-            <a:avLst/>
-          </a:prstGeom>
-          <a:noFill/>
-        </p:spPr>
-        <p:txBody>
-          <a:bodyPr wrap="square" rtlCol="0">
-            <a:normAutofit fontScale="55000" lnSpcReduction="20000"/>
-          </a:bodyPr>
-          <a:lstStyle/>
-          <a:p>
-            <a:pPr>
-              <a:defRPr/>
-            </a:pPr>
-            <a:r>
-              <a:rPr lang="ja-JP" altLang="en-US"/>
-              <a:t>Free resources</a:t>
-            </a:r>
-            <a:endParaRPr kumimoji="1" lang="ja-JP" altLang="en-US"/>
-          </a:p>
-        </p:txBody>
-      </p:sp>
-      <p:sp>
-        <p:nvSpPr>
-          <p:cNvPr id="26" name="テキスト ボックス 25">
-            <a:extLst>
-              <a:ext uri="{FF2B5EF4-FFF2-40B4-BE49-F238E27FC236}">
-                <a16:creationId xmlns:a16="http://schemas.microsoft.com/office/drawing/2014/main" id="{690B50D8-1502-6142-9C37-DEBF7A10C91E}"/>
-              </a:ext>
-            </a:extLst>
-          </p:cNvPr>
-          <p:cNvSpPr txBox="1"/>
-          <p:nvPr/>
-        </p:nvSpPr>
-        <p:spPr>
-          <a:xfrm>
-            <a:off x="1808072" y="2734586"/>
-            <a:ext cx="952921" cy="317640"/>
-          </a:xfrm>
-          <a:prstGeom prst="rect">
-            <a:avLst/>
-          </a:prstGeom>
-          <a:noFill/>
-        </p:spPr>
-        <p:txBody>
-          <a:bodyPr wrap="square" rtlCol="0">
-            <a:normAutofit fontScale="55000" lnSpcReduction="20000"/>
-          </a:bodyPr>
-          <a:lstStyle/>
-          <a:p>
-            <a:pPr>
-              <a:defRPr/>
-            </a:pPr>
-            <a:r>
-              <a:rPr lang="ja-JP" altLang="en-US"/>
-              <a:t>Free resources</a:t>
-            </a:r>
             <a:endParaRPr kumimoji="1" lang="ja-JP" altLang="en-US"/>
           </a:p>
         </p:txBody>
@@ -15400,44 +15356,6 @@
           </a:fontRef>
         </p:style>
       </p:cxnSp>
-      <p:sp>
-        <p:nvSpPr>
-          <p:cNvPr id="40" name="テキスト ボックス 39">
-            <a:extLst>
-              <a:ext uri="{FF2B5EF4-FFF2-40B4-BE49-F238E27FC236}">
-                <a16:creationId xmlns:a16="http://schemas.microsoft.com/office/drawing/2014/main" id="{AA797177-1DE4-D04C-85FF-A7CC03354595}"/>
-              </a:ext>
-            </a:extLst>
-          </p:cNvPr>
-          <p:cNvSpPr txBox="1"/>
-          <p:nvPr/>
-        </p:nvSpPr>
-        <p:spPr>
-          <a:xfrm>
-            <a:off x="1282576" y="3591367"/>
-            <a:ext cx="776453" cy="264700"/>
-          </a:xfrm>
-          <a:prstGeom prst="rect">
-            <a:avLst/>
-          </a:prstGeom>
-          <a:noFill/>
-        </p:spPr>
-        <p:txBody>
-          <a:bodyPr wrap="square" rtlCol="0">
-            <a:normAutofit fontScale="55000" lnSpcReduction="20000"/>
-          </a:bodyPr>
-          <a:lstStyle/>
-          <a:p>
-            <a:pPr>
-              <a:defRPr/>
-            </a:pPr>
-            <a:r>
-              <a:rPr kumimoji="1" lang="ja-JP" altLang="en-US" sz="1400"/>
-              <a:t>Current time</a:t>
-            </a:r>
-          </a:p>
-        </p:txBody>
-      </p:sp>
       <p:cxnSp>
         <p:nvCxnSpPr>
           <p:cNvPr id="41" name="直線矢印コネクタ 40">
@@ -15480,44 +15398,6 @@
           </a:fontRef>
         </p:style>
       </p:cxnSp>
-      <p:sp>
-        <p:nvSpPr>
-          <p:cNvPr id="42" name="テキスト ボックス 41">
-            <a:extLst>
-              <a:ext uri="{FF2B5EF4-FFF2-40B4-BE49-F238E27FC236}">
-                <a16:creationId xmlns:a16="http://schemas.microsoft.com/office/drawing/2014/main" id="{11E2F8E0-E6D2-B14B-B009-504E0D519A34}"/>
-              </a:ext>
-            </a:extLst>
-          </p:cNvPr>
-          <p:cNvSpPr txBox="1"/>
-          <p:nvPr/>
-        </p:nvSpPr>
-        <p:spPr>
-          <a:xfrm>
-            <a:off x="2458146" y="3581207"/>
-            <a:ext cx="1085270" cy="264700"/>
-          </a:xfrm>
-          <a:prstGeom prst="rect">
-            <a:avLst/>
-          </a:prstGeom>
-          <a:noFill/>
-        </p:spPr>
-        <p:txBody>
-          <a:bodyPr wrap="square" rtlCol="0">
-            <a:normAutofit fontScale="55000" lnSpcReduction="20000"/>
-          </a:bodyPr>
-          <a:lstStyle/>
-          <a:p>
-            <a:pPr>
-              <a:defRPr/>
-            </a:pPr>
-            <a:r>
-              <a:rPr kumimoji="1" lang="ja-JP" altLang="en-US" sz="1400"/>
-              <a:t>Estimated end time</a:t>
-            </a:r>
-          </a:p>
-        </p:txBody>
-      </p:sp>
       <p:sp>
         <p:nvSpPr>
           <p:cNvPr id="43" name="正方形/長方形 42">
@@ -15566,45 +15446,6 @@
               <a:rPr kumimoji="1" lang="en-US" altLang="ja-JP" sz="1400"/>
               <a:t>4-node job</a:t>
             </a:r>
-          </a:p>
-        </p:txBody>
-      </p:sp>
-      <p:sp>
-        <p:nvSpPr>
-          <p:cNvPr id="47" name="テキスト ボックス 46">
-            <a:extLst>
-              <a:ext uri="{FF2B5EF4-FFF2-40B4-BE49-F238E27FC236}">
-                <a16:creationId xmlns:a16="http://schemas.microsoft.com/office/drawing/2014/main" id="{CC5DDED7-AF12-1447-B0D6-648CED9C676C}"/>
-              </a:ext>
-            </a:extLst>
-          </p:cNvPr>
-          <p:cNvSpPr txBox="1"/>
-          <p:nvPr/>
-        </p:nvSpPr>
-        <p:spPr>
-          <a:xfrm>
-            <a:off x="1797912" y="6138186"/>
-            <a:ext cx="952921" cy="317640"/>
-          </a:xfrm>
-          <a:prstGeom prst="rect">
-            <a:avLst/>
-          </a:prstGeom>
-          <a:noFill/>
-        </p:spPr>
-        <p:txBody>
-          <a:bodyPr wrap="square" rtlCol="0">
-            <a:normAutofit fontScale="55000" lnSpcReduction="20000"/>
-          </a:bodyPr>
-          <a:lstStyle/>
-          <a:p>
-            <a:pPr>
-              <a:defRPr/>
-            </a:pPr>
-            <a:r>
-              <a:rPr lang="ja-JP" altLang="en-US"/>
-              <a:t>Free resources</a:t>
-            </a:r>
-            <a:endParaRPr kumimoji="1" lang="ja-JP" altLang="en-US"/>
           </a:p>
         </p:txBody>
       </p:sp>
@@ -15901,101 +15742,6 @@
           </a:p>
         </p:txBody>
       </p:sp>
-      <p:sp>
-        <p:nvSpPr>
-          <p:cNvPr id="53" name="テキスト ボックス 52">
-            <a:extLst>
-              <a:ext uri="{FF2B5EF4-FFF2-40B4-BE49-F238E27FC236}">
-                <a16:creationId xmlns:a16="http://schemas.microsoft.com/office/drawing/2014/main" id="{7D0626AA-1FB3-AC45-BB8E-BAED6D1B1056}"/>
-              </a:ext>
-            </a:extLst>
-          </p:cNvPr>
-          <p:cNvSpPr txBox="1"/>
-          <p:nvPr/>
-        </p:nvSpPr>
-        <p:spPr>
-          <a:xfrm>
-            <a:off x="6360160" y="680720"/>
-            <a:ext cx="2969083" cy="738664"/>
-          </a:xfrm>
-          <a:prstGeom prst="rect">
-            <a:avLst/>
-          </a:prstGeom>
-          <a:noFill/>
-        </p:spPr>
-        <p:txBody>
-          <a:bodyPr wrap="square" rtlCol="0"/>
-          <a:lstStyle/>
-          <a:p>
-            <a:pPr>
-              <a:defRPr sz="1350"/>
-            </a:pPr>
-            <a:r>
-              <a:rPr kumimoji="1" lang="en-US" altLang="ja-JP" sz="1350"/>
-              <a:t>A 1-node job is running</a:t>
-            </a:r>
-            <a:endParaRPr kumimoji="1" lang="en-US" altLang="ja-JP" sz="1400"/>
-          </a:p>
-          <a:p>
-            <a:pPr>
-              <a:defRPr sz="1350"/>
-            </a:pPr>
-            <a:r>
-              <a:rPr kumimoji="1" lang="en-US" altLang="ja-JP" sz="1350"/>
-              <a:t>A 4-node job is waiting</a:t>
-            </a:r>
-            <a:endParaRPr kumimoji="1" lang="en-US" altLang="ja-JP" sz="1400"/>
-          </a:p>
-          <a:p>
-            <a:pPr>
-              <a:defRPr sz="1350"/>
-            </a:pPr>
-            <a:r>
-              <a:rPr kumimoji="1" lang="en-US" altLang="ja-JP" sz="1350"/>
-              <a:t>Then a short 2-node job arrives</a:t>
-            </a:r>
-            <a:endParaRPr kumimoji="1" lang="en-US" altLang="ja-JP" sz="1400"/>
-          </a:p>
-        </p:txBody>
-      </p:sp>
-      <p:sp>
-        <p:nvSpPr>
-          <p:cNvPr id="56" name="テキスト ボックス 55">
-            <a:extLst>
-              <a:ext uri="{FF2B5EF4-FFF2-40B4-BE49-F238E27FC236}">
-                <a16:creationId xmlns:a16="http://schemas.microsoft.com/office/drawing/2014/main" id="{85519E67-B5E1-084F-AB64-6EF16B3A7CB8}"/>
-              </a:ext>
-            </a:extLst>
-          </p:cNvPr>
-          <p:cNvSpPr txBox="1"/>
-          <p:nvPr/>
-        </p:nvSpPr>
-        <p:spPr>
-          <a:xfrm>
-            <a:off x="7391718" y="5008880"/>
-            <a:ext cx="492443" cy="1118255"/>
-          </a:xfrm>
-          <a:prstGeom prst="rect">
-            <a:avLst/>
-          </a:prstGeom>
-          <a:noFill/>
-        </p:spPr>
-        <p:txBody>
-          <a:bodyPr vert="eaVert" wrap="square" rtlCol="0">
-            <a:normAutofit fontScale="85000" lnSpcReduction="10000"/>
-          </a:bodyPr>
-          <a:lstStyle/>
-          <a:p>
-            <a:pPr>
-              <a:defRPr/>
-            </a:pPr>
-            <a:r>
-              <a:rPr kumimoji="1" lang="ja-JP" altLang="en-US" sz="2000" b="1"/>
-              <a:t>As planned</a:t>
-            </a:r>
-          </a:p>
-        </p:txBody>
-      </p:sp>
       <p:pic>
         <p:nvPicPr>
           <p:cNvPr id="57" name="図 56">
@@ -16018,7 +15764,7 @@
         </p:blipFill>
         <p:spPr>
           <a:xfrm>
-            <a:off x="7561580" y="4980940"/>
+            <a:off x="7382200" y="4642094"/>
             <a:ext cx="1572260" cy="1572260"/>
           </a:xfrm>
           <a:prstGeom prst="rect">
@@ -16028,10 +15774,10 @@
       </p:pic>
       <p:sp>
         <p:nvSpPr>
-          <p:cNvPr id="58" name="テキスト ボックス 57">
-            <a:extLst>
-              <a:ext uri="{FF2B5EF4-FFF2-40B4-BE49-F238E27FC236}">
-                <a16:creationId xmlns:a16="http://schemas.microsoft.com/office/drawing/2014/main" id="{3ECF81AF-545C-BC43-A276-84911C53DF80}"/>
+          <p:cNvPr id="2" name="テキスト ボックス 1">
+            <a:extLst>
+              <a:ext uri="{FF2B5EF4-FFF2-40B4-BE49-F238E27FC236}">
+                <a16:creationId xmlns:a16="http://schemas.microsoft.com/office/drawing/2014/main" id="{511EEC58-41F5-709B-FC4E-5E48758FA6E9}"/>
               </a:ext>
             </a:extLst>
           </p:cNvPr>
@@ -16040,8 +15786,8 @@
         </p:nvSpPr>
         <p:spPr>
           <a:xfrm>
-            <a:off x="6329680" y="4003040"/>
-            <a:ext cx="3057247" cy="738664"/>
+            <a:off x="7555021" y="6214354"/>
+            <a:ext cx="1226618" cy="369332"/>
           </a:xfrm>
           <a:prstGeom prst="rect">
             <a:avLst/>
@@ -16054,24 +15800,383 @@
           </a:bodyPr>
           <a:lstStyle/>
           <a:p>
-            <a:pPr>
-              <a:defRPr/>
-            </a:pPr>
-            <a:r>
-              <a:rPr lang="ja-JP" altLang="en-US" sz="1400"/>
+            <a:r>
+              <a:rPr kumimoji="1" lang="en-US" altLang="ja-JP" dirty="0"/>
+              <a:t>As planned</a:t>
+            </a:r>
+            <a:endParaRPr kumimoji="1" lang="ja-JP" altLang="en-US"/>
+          </a:p>
+        </p:txBody>
+      </p:sp>
+      <p:sp>
+        <p:nvSpPr>
+          <p:cNvPr id="8" name="テキスト ボックス 7">
+            <a:extLst>
+              <a:ext uri="{FF2B5EF4-FFF2-40B4-BE49-F238E27FC236}">
+                <a16:creationId xmlns:a16="http://schemas.microsoft.com/office/drawing/2014/main" id="{03F8048F-B319-406E-8B98-1469B85ACDC1}"/>
+              </a:ext>
+            </a:extLst>
+          </p:cNvPr>
+          <p:cNvSpPr txBox="1"/>
+          <p:nvPr/>
+        </p:nvSpPr>
+        <p:spPr>
+          <a:xfrm>
+            <a:off x="6434527" y="3815535"/>
+            <a:ext cx="3337085" cy="646331"/>
+          </a:xfrm>
+          <a:prstGeom prst="rect">
+            <a:avLst/>
+          </a:prstGeom>
+          <a:noFill/>
+        </p:spPr>
+        <p:txBody>
+          <a:bodyPr wrap="square">
+            <a:spAutoFit/>
+          </a:bodyPr>
+          <a:lstStyle/>
+          <a:p>
+            <a:r>
+              <a:rPr lang="ja-JP" altLang="en-US"/>
               <a:t>A later 2-node job overtakes the earlier job and runs</a:t>
             </a:r>
-            <a:endParaRPr lang="en-US" altLang="ja-JP" sz="1400"/>
-          </a:p>
-          <a:p>
-            <a:pPr>
-              <a:defRPr/>
-            </a:pPr>
-            <a:r>
-              <a:rPr lang="ja-JP" altLang="en-US" sz="1400"/>
+            <a:r>
+              <a:rPr lang="en-US" altLang="ja-JP" dirty="0"/>
+              <a:t> </a:t>
+            </a:r>
+            <a:r>
+              <a:rPr lang="ja-JP" altLang="en-US"/>
               <a:t>(backfill)</a:t>
             </a:r>
-            <a:endParaRPr lang="en-US" altLang="ja-JP" sz="1400"/>
+          </a:p>
+        </p:txBody>
+      </p:sp>
+      <p:sp>
+        <p:nvSpPr>
+          <p:cNvPr id="16" name="テキスト ボックス 15">
+            <a:extLst>
+              <a:ext uri="{FF2B5EF4-FFF2-40B4-BE49-F238E27FC236}">
+                <a16:creationId xmlns:a16="http://schemas.microsoft.com/office/drawing/2014/main" id="{34007C0C-810B-DA0C-7776-BC99A23E2F76}"/>
+              </a:ext>
+            </a:extLst>
+          </p:cNvPr>
+          <p:cNvSpPr txBox="1"/>
+          <p:nvPr/>
+        </p:nvSpPr>
+        <p:spPr>
+          <a:xfrm>
+            <a:off x="6434527" y="973322"/>
+            <a:ext cx="3114038" cy="923330"/>
+          </a:xfrm>
+          <a:prstGeom prst="rect">
+            <a:avLst/>
+          </a:prstGeom>
+          <a:noFill/>
+        </p:spPr>
+        <p:txBody>
+          <a:bodyPr wrap="square">
+            <a:spAutoFit/>
+          </a:bodyPr>
+          <a:lstStyle/>
+          <a:p>
+            <a:r>
+              <a:rPr lang="ja-JP" altLang="en-US"/>
+              <a:t>A 1-node job is running</a:t>
+            </a:r>
+          </a:p>
+          <a:p>
+            <a:r>
+              <a:rPr lang="ja-JP" altLang="en-US"/>
+              <a:t>A 4-node job is waiting</a:t>
+            </a:r>
+          </a:p>
+          <a:p>
+            <a:r>
+              <a:rPr lang="ja-JP" altLang="en-US"/>
+              <a:t>Then a short 2-node job arrives</a:t>
+            </a:r>
+          </a:p>
+        </p:txBody>
+      </p:sp>
+      <p:sp>
+        <p:nvSpPr>
+          <p:cNvPr id="27" name="テキスト ボックス 26">
+            <a:extLst>
+              <a:ext uri="{FF2B5EF4-FFF2-40B4-BE49-F238E27FC236}">
+                <a16:creationId xmlns:a16="http://schemas.microsoft.com/office/drawing/2014/main" id="{4D3C522F-E3A9-1F15-C9CB-F645A6BF324A}"/>
+              </a:ext>
+            </a:extLst>
+          </p:cNvPr>
+          <p:cNvSpPr txBox="1"/>
+          <p:nvPr/>
+        </p:nvSpPr>
+        <p:spPr>
+          <a:xfrm>
+            <a:off x="1208473" y="146296"/>
+            <a:ext cx="972009" cy="276999"/>
+          </a:xfrm>
+          <a:prstGeom prst="rect">
+            <a:avLst/>
+          </a:prstGeom>
+          <a:noFill/>
+        </p:spPr>
+        <p:txBody>
+          <a:bodyPr wrap="square">
+            <a:spAutoFit/>
+          </a:bodyPr>
+          <a:lstStyle/>
+          <a:p>
+            <a:r>
+              <a:rPr lang="ja-JP" altLang="en-US" sz="1200"/>
+              <a:t>Current time</a:t>
+            </a:r>
+          </a:p>
+        </p:txBody>
+      </p:sp>
+      <p:sp>
+        <p:nvSpPr>
+          <p:cNvPr id="28" name="テキスト ボックス 27">
+            <a:extLst>
+              <a:ext uri="{FF2B5EF4-FFF2-40B4-BE49-F238E27FC236}">
+                <a16:creationId xmlns:a16="http://schemas.microsoft.com/office/drawing/2014/main" id="{E04E699B-8635-2523-32E3-567B2B41F505}"/>
+              </a:ext>
+            </a:extLst>
+          </p:cNvPr>
+          <p:cNvSpPr txBox="1"/>
+          <p:nvPr/>
+        </p:nvSpPr>
+        <p:spPr>
+          <a:xfrm>
+            <a:off x="2284532" y="146296"/>
+            <a:ext cx="1394942" cy="276999"/>
+          </a:xfrm>
+          <a:prstGeom prst="rect">
+            <a:avLst/>
+          </a:prstGeom>
+          <a:noFill/>
+        </p:spPr>
+        <p:txBody>
+          <a:bodyPr wrap="square">
+            <a:spAutoFit/>
+          </a:bodyPr>
+          <a:lstStyle/>
+          <a:p>
+            <a:r>
+              <a:rPr lang="en-US" altLang="ja-JP" sz="1200" dirty="0"/>
+              <a:t>Estimated end time</a:t>
+            </a:r>
+            <a:endParaRPr lang="ja-JP" altLang="en-US" sz="1200"/>
+          </a:p>
+        </p:txBody>
+      </p:sp>
+      <p:sp>
+        <p:nvSpPr>
+          <p:cNvPr id="44" name="テキスト ボックス 43">
+            <a:extLst>
+              <a:ext uri="{FF2B5EF4-FFF2-40B4-BE49-F238E27FC236}">
+                <a16:creationId xmlns:a16="http://schemas.microsoft.com/office/drawing/2014/main" id="{1110D332-DFE2-F8C8-0F34-7AB36BC633D1}"/>
+              </a:ext>
+            </a:extLst>
+          </p:cNvPr>
+          <p:cNvSpPr txBox="1"/>
+          <p:nvPr/>
+        </p:nvSpPr>
+        <p:spPr>
+          <a:xfrm>
+            <a:off x="1208473" y="3585131"/>
+            <a:ext cx="972009" cy="276999"/>
+          </a:xfrm>
+          <a:prstGeom prst="rect">
+            <a:avLst/>
+          </a:prstGeom>
+          <a:noFill/>
+        </p:spPr>
+        <p:txBody>
+          <a:bodyPr wrap="square">
+            <a:spAutoFit/>
+          </a:bodyPr>
+          <a:lstStyle/>
+          <a:p>
+            <a:r>
+              <a:rPr lang="ja-JP" altLang="en-US" sz="1200"/>
+              <a:t>Current time</a:t>
+            </a:r>
+          </a:p>
+        </p:txBody>
+      </p:sp>
+      <p:sp>
+        <p:nvSpPr>
+          <p:cNvPr id="45" name="テキスト ボックス 44">
+            <a:extLst>
+              <a:ext uri="{FF2B5EF4-FFF2-40B4-BE49-F238E27FC236}">
+                <a16:creationId xmlns:a16="http://schemas.microsoft.com/office/drawing/2014/main" id="{D79D54BD-AA4A-4E11-CD90-DDFE97CDC1D1}"/>
+              </a:ext>
+            </a:extLst>
+          </p:cNvPr>
+          <p:cNvSpPr txBox="1"/>
+          <p:nvPr/>
+        </p:nvSpPr>
+        <p:spPr>
+          <a:xfrm>
+            <a:off x="2284532" y="3585131"/>
+            <a:ext cx="1394942" cy="276999"/>
+          </a:xfrm>
+          <a:prstGeom prst="rect">
+            <a:avLst/>
+          </a:prstGeom>
+          <a:noFill/>
+        </p:spPr>
+        <p:txBody>
+          <a:bodyPr wrap="square">
+            <a:spAutoFit/>
+          </a:bodyPr>
+          <a:lstStyle/>
+          <a:p>
+            <a:r>
+              <a:rPr lang="en-US" altLang="ja-JP" sz="1200" dirty="0"/>
+              <a:t>Estimated end time</a:t>
+            </a:r>
+            <a:endParaRPr lang="ja-JP" altLang="en-US" sz="1200"/>
+          </a:p>
+        </p:txBody>
+      </p:sp>
+      <p:sp>
+        <p:nvSpPr>
+          <p:cNvPr id="54" name="テキスト ボックス 53">
+            <a:extLst>
+              <a:ext uri="{FF2B5EF4-FFF2-40B4-BE49-F238E27FC236}">
+                <a16:creationId xmlns:a16="http://schemas.microsoft.com/office/drawing/2014/main" id="{18626944-1C54-655C-85D2-20D546157B98}"/>
+              </a:ext>
+            </a:extLst>
+          </p:cNvPr>
+          <p:cNvSpPr txBox="1"/>
+          <p:nvPr/>
+        </p:nvSpPr>
+        <p:spPr>
+          <a:xfrm>
+            <a:off x="1676319" y="1466133"/>
+            <a:ext cx="1096641" cy="276999"/>
+          </a:xfrm>
+          <a:prstGeom prst="rect">
+            <a:avLst/>
+          </a:prstGeom>
+          <a:noFill/>
+        </p:spPr>
+        <p:txBody>
+          <a:bodyPr wrap="square">
+            <a:spAutoFit/>
+          </a:bodyPr>
+          <a:lstStyle/>
+          <a:p>
+            <a:r>
+              <a:rPr lang="ja-JP" altLang="en-US" sz="1200"/>
+              <a:t>Free resources</a:t>
+            </a:r>
+          </a:p>
+        </p:txBody>
+      </p:sp>
+      <p:sp>
+        <p:nvSpPr>
+          <p:cNvPr id="55" name="テキスト ボックス 54">
+            <a:extLst>
+              <a:ext uri="{FF2B5EF4-FFF2-40B4-BE49-F238E27FC236}">
+                <a16:creationId xmlns:a16="http://schemas.microsoft.com/office/drawing/2014/main" id="{6E221EBB-45CD-974D-01F9-70F57924CA9C}"/>
+              </a:ext>
+            </a:extLst>
+          </p:cNvPr>
+          <p:cNvSpPr txBox="1"/>
+          <p:nvPr/>
+        </p:nvSpPr>
+        <p:spPr>
+          <a:xfrm>
+            <a:off x="1676319" y="2087948"/>
+            <a:ext cx="1096641" cy="276999"/>
+          </a:xfrm>
+          <a:prstGeom prst="rect">
+            <a:avLst/>
+          </a:prstGeom>
+          <a:noFill/>
+        </p:spPr>
+        <p:txBody>
+          <a:bodyPr wrap="square">
+            <a:spAutoFit/>
+          </a:bodyPr>
+          <a:lstStyle/>
+          <a:p>
+            <a:r>
+              <a:rPr lang="ja-JP" altLang="en-US" sz="1200"/>
+              <a:t>Free resources</a:t>
+            </a:r>
+          </a:p>
+        </p:txBody>
+      </p:sp>
+      <p:sp>
+        <p:nvSpPr>
+          <p:cNvPr id="59" name="テキスト ボックス 58">
+            <a:extLst>
+              <a:ext uri="{FF2B5EF4-FFF2-40B4-BE49-F238E27FC236}">
+                <a16:creationId xmlns:a16="http://schemas.microsoft.com/office/drawing/2014/main" id="{96608EC9-00B3-D4BB-BD8F-28598FB9BE6B}"/>
+              </a:ext>
+            </a:extLst>
+          </p:cNvPr>
+          <p:cNvSpPr txBox="1"/>
+          <p:nvPr/>
+        </p:nvSpPr>
+        <p:spPr>
+          <a:xfrm>
+            <a:off x="1676319" y="2732204"/>
+            <a:ext cx="1096641" cy="276999"/>
+          </a:xfrm>
+          <a:prstGeom prst="rect">
+            <a:avLst/>
+          </a:prstGeom>
+          <a:noFill/>
+        </p:spPr>
+        <p:txBody>
+          <a:bodyPr wrap="square">
+            <a:spAutoFit/>
+          </a:bodyPr>
+          <a:lstStyle/>
+          <a:p>
+            <a:r>
+              <a:rPr lang="ja-JP" altLang="en-US" sz="1200"/>
+              <a:t>Free resources</a:t>
+            </a:r>
+          </a:p>
+        </p:txBody>
+      </p:sp>
+      <p:sp>
+        <p:nvSpPr>
+          <p:cNvPr id="60" name="テキスト ボックス 59">
+            <a:extLst>
+              <a:ext uri="{FF2B5EF4-FFF2-40B4-BE49-F238E27FC236}">
+                <a16:creationId xmlns:a16="http://schemas.microsoft.com/office/drawing/2014/main" id="{AFFB7B9A-02C8-1419-35D2-81A28AF07AA0}"/>
+              </a:ext>
+            </a:extLst>
+          </p:cNvPr>
+          <p:cNvSpPr txBox="1"/>
+          <p:nvPr/>
+        </p:nvSpPr>
+        <p:spPr>
+          <a:xfrm>
+            <a:off x="1676319" y="6155458"/>
+            <a:ext cx="1096641" cy="276999"/>
+          </a:xfrm>
+          <a:prstGeom prst="rect">
+            <a:avLst/>
+          </a:prstGeom>
+          <a:noFill/>
+        </p:spPr>
+        <p:txBody>
+          <a:bodyPr wrap="square">
+            <a:spAutoFit/>
+          </a:bodyPr>
+          <a:lstStyle/>
+          <a:p>
+            <a:r>
+              <a:rPr lang="ja-JP" altLang="en-US" sz="1200"/>
+              <a:t>Free resources</a:t>
+            </a:r>
           </a:p>
         </p:txBody>
       </p:sp>
@@ -16304,7 +16409,7 @@
         <p:spPr>
           <a:xfrm>
             <a:off x="334537" y="959005"/>
-            <a:ext cx="954107" cy="400110"/>
+            <a:ext cx="658023" cy="370778"/>
           </a:xfrm>
           <a:prstGeom prst="rect">
             <a:avLst/>
@@ -16339,8 +16444,8 @@
         </p:nvSpPr>
         <p:spPr>
           <a:xfrm>
-            <a:off x="2360342" y="2248831"/>
-            <a:ext cx="1800493" cy="369332"/>
+            <a:off x="2554465" y="2302727"/>
+            <a:ext cx="1244944" cy="369332"/>
           </a:xfrm>
           <a:prstGeom prst="rect">
             <a:avLst/>
@@ -16348,7 +16453,7 @@
           <a:noFill/>
         </p:spPr>
         <p:txBody>
-          <a:bodyPr wrap="none" rtlCol="0">
+          <a:bodyPr wrap="square" rtlCol="0">
             <a:spAutoFit/>
           </a:bodyPr>
           <a:lstStyle/>
@@ -16377,8 +16482,8 @@
         </p:nvSpPr>
         <p:spPr>
           <a:xfrm>
-            <a:off x="4185423" y="2178205"/>
-            <a:ext cx="2262158" cy="369332"/>
+            <a:off x="4338728" y="2302727"/>
+            <a:ext cx="1549092" cy="369332"/>
           </a:xfrm>
           <a:prstGeom prst="rect">
             <a:avLst/>
@@ -16386,7 +16491,7 @@
           <a:noFill/>
         </p:spPr>
         <p:txBody>
-          <a:bodyPr wrap="none" rtlCol="0">
+          <a:bodyPr wrap="square" rtlCol="0">
             <a:spAutoFit/>
           </a:bodyPr>
           <a:lstStyle/>
@@ -16626,8 +16731,8 @@
         </p:nvSpPr>
         <p:spPr>
           <a:xfrm>
-            <a:off x="1368131" y="3136466"/>
-            <a:ext cx="1107996" cy="369332"/>
+            <a:off x="1537557" y="3164881"/>
+            <a:ext cx="730320" cy="369332"/>
           </a:xfrm>
           <a:prstGeom prst="rect">
             <a:avLst/>
@@ -16644,7 +16749,7 @@
           </a:ln>
         </p:spPr>
         <p:txBody>
-          <a:bodyPr wrap="none" rtlCol="0">
+          <a:bodyPr wrap="square" rtlCol="0">
             <a:spAutoFit/>
           </a:bodyPr>
           <a:lstStyle/>
@@ -16713,8 +16818,8 @@
         </p:nvSpPr>
         <p:spPr>
           <a:xfrm>
-            <a:off x="7240611" y="1086627"/>
-            <a:ext cx="1338828" cy="369332"/>
+            <a:off x="7339371" y="1105064"/>
+            <a:ext cx="1502128" cy="310047"/>
           </a:xfrm>
           <a:prstGeom prst="rect">
             <a:avLst/>
@@ -16729,7 +16834,7 @@
               <a:defRPr sz="1450"/>
             </a:pPr>
             <a:r>
-              <a:rPr kumimoji="1" lang="ja-JP" altLang="en-US" sz="1450" dirty="0"/>
+              <a:rPr kumimoji="1" lang="ja-JP" altLang="en-US" sz="1600" dirty="0"/>
               <a:t>Compute node</a:t>
             </a:r>
           </a:p>
@@ -16895,7 +17000,7 @@
         </p:blipFill>
         <p:spPr>
           <a:xfrm>
-            <a:off x="6453769" y="2252545"/>
+            <a:off x="6648893" y="2041139"/>
             <a:ext cx="577075" cy="577075"/>
           </a:xfrm>
           <a:prstGeom prst="rect">
@@ -16931,7 +17036,7 @@
         </p:blipFill>
         <p:spPr>
           <a:xfrm>
-            <a:off x="6706530" y="2951355"/>
+            <a:off x="6648893" y="3004469"/>
             <a:ext cx="577075" cy="577075"/>
           </a:xfrm>
           <a:prstGeom prst="rect">
@@ -16967,7 +17072,7 @@
         </p:blipFill>
         <p:spPr>
           <a:xfrm>
-            <a:off x="6669359" y="3884341"/>
+            <a:off x="6648893" y="3902958"/>
             <a:ext cx="577075" cy="577075"/>
           </a:xfrm>
           <a:prstGeom prst="rect">
@@ -16989,8 +17094,8 @@
         </p:nvSpPr>
         <p:spPr>
           <a:xfrm>
-            <a:off x="4806778" y="691978"/>
-            <a:ext cx="1415772" cy="461665"/>
+            <a:off x="4185423" y="691978"/>
+            <a:ext cx="2613289" cy="461665"/>
           </a:xfrm>
           <a:prstGeom prst="rect">
             <a:avLst/>
@@ -17008,7 +17113,7 @@
         </p:spPr>
         <p:txBody>
           <a:bodyPr wrap="square" rtlCol="0">
-            <a:normAutofit fontScale="55000" lnSpcReduction="20000"/>
+            <a:normAutofit/>
           </a:bodyPr>
           <a:lstStyle/>
           <a:p>
@@ -17039,8 +17144,8 @@
         </p:nvSpPr>
         <p:spPr>
           <a:xfrm>
-            <a:off x="6343337" y="1746322"/>
-            <a:ext cx="824265" cy="400110"/>
+            <a:off x="6658689" y="1519670"/>
+            <a:ext cx="710862" cy="400110"/>
           </a:xfrm>
           <a:prstGeom prst="rect">
             <a:avLst/>
@@ -17235,19 +17340,19 @@
           <a:lstStyle/>
           <a:p>
             <a:r>
-              <a:rPr kumimoji="1" lang="en-US" altLang="ja-JP"/>
+              <a:rPr kumimoji="1" lang="en-US" altLang="ja-JP" dirty="0"/>
               <a:t>#!/bin/bash</a:t>
             </a:r>
           </a:p>
           <a:p>
             <a:r>
-              <a:rPr kumimoji="1" lang="en-US" altLang="ja-JP"/>
+              <a:rPr kumimoji="1" lang="en-US" altLang="ja-JP" dirty="0"/>
               <a:t>#PBS -l nodes=1:ppn=2</a:t>
             </a:r>
           </a:p>
           <a:p>
             <a:r>
-              <a:rPr lang="en-US" altLang="ja-JP"/>
+              <a:rPr lang="en-US" altLang="ja-JP" dirty="0"/>
               <a:t>#PBS –l walltime=00:01:00</a:t>
             </a:r>
             <a:endParaRPr kumimoji="1" lang="ja-JP" altLang="en-US"/>
@@ -17651,11 +17756,11 @@
           <a:lstStyle/>
           <a:p>
             <a:r>
-              <a:rPr lang="en-US" altLang="ja-JP"/>
+              <a:rPr lang="en-US" altLang="ja-JP" dirty="0"/>
               <a:t>$ </a:t>
             </a:r>
             <a:r>
-              <a:rPr kumimoji="1" lang="en-US" altLang="ja-JP"/>
+              <a:rPr kumimoji="1" lang="en-US" altLang="ja-JP" dirty="0"/>
               <a:t>qsub job.sh</a:t>
             </a:r>
             <a:endParaRPr kumimoji="1" lang="ja-JP" altLang="en-US"/>
@@ -17736,8 +17841,8 @@
         </p:nvSpPr>
         <p:spPr>
           <a:xfrm>
-            <a:off x="680720" y="2113280"/>
-            <a:ext cx="2682240" cy="1859280"/>
+            <a:off x="272480" y="2113280"/>
+            <a:ext cx="3528392" cy="1891784"/>
           </a:xfrm>
           <a:prstGeom prst="rect">
             <a:avLst/>
@@ -17767,7 +17872,10 @@
               <a:defRPr/>
             </a:pPr>
             <a:r>
-              <a:rPr kumimoji="1" lang="en-US" altLang="ja-JP"/>
+              <a:rPr kumimoji="1" lang="en-US" altLang="ja-JP" dirty="0">
+                <a:latin typeface="Consolas" panose="020B0609020204030204" pitchFamily="49" charset="0"/>
+                <a:cs typeface="Consolas" panose="020B0609020204030204" pitchFamily="49" charset="0"/>
+              </a:rPr>
               <a:t>#!/bin/bash</a:t>
             </a:r>
           </a:p>
@@ -17776,7 +17884,10 @@
               <a:defRPr/>
             </a:pPr>
             <a:r>
-              <a:rPr kumimoji="1" lang="en-US" altLang="ja-JP"/>
+              <a:rPr kumimoji="1" lang="en-US" altLang="ja-JP" dirty="0">
+                <a:latin typeface="Consolas" panose="020B0609020204030204" pitchFamily="49" charset="0"/>
+                <a:cs typeface="Consolas" panose="020B0609020204030204" pitchFamily="49" charset="0"/>
+              </a:rPr>
               <a:t>#PBS -l nodes=1:ppn=2</a:t>
             </a:r>
           </a:p>
@@ -17785,10 +17896,16 @@
               <a:defRPr/>
             </a:pPr>
             <a:r>
-              <a:rPr lang="en-US" altLang="ja-JP"/>
+              <a:rPr lang="en-US" altLang="ja-JP" dirty="0">
+                <a:latin typeface="Consolas" panose="020B0609020204030204" pitchFamily="49" charset="0"/>
+                <a:cs typeface="Consolas" panose="020B0609020204030204" pitchFamily="49" charset="0"/>
+              </a:rPr>
               <a:t>#PBS –l walltime=00:01:00</a:t>
             </a:r>
-            <a:endParaRPr kumimoji="1" lang="ja-JP" altLang="en-US"/>
+            <a:endParaRPr kumimoji="1" lang="ja-JP" altLang="en-US">
+              <a:latin typeface="Consolas" panose="020B0609020204030204" pitchFamily="49" charset="0"/>
+              <a:cs typeface="Consolas" panose="020B0609020204030204" pitchFamily="49" charset="0"/>
+            </a:endParaRPr>
           </a:p>
         </p:txBody>
       </p:sp>
@@ -17806,8 +17923,8 @@
         </p:nvSpPr>
         <p:spPr>
           <a:xfrm>
-            <a:off x="721360" y="3078480"/>
-            <a:ext cx="2560320" cy="782320"/>
+            <a:off x="317838" y="3037840"/>
+            <a:ext cx="3267010" cy="782320"/>
           </a:xfrm>
           <a:prstGeom prst="rect">
             <a:avLst/>
@@ -17840,10 +17957,12 @@
               <a:defRPr/>
             </a:pPr>
             <a:r>
-              <a:rPr kumimoji="1" lang="en-US" altLang="ja-JP">
+              <a:rPr kumimoji="1" lang="en-US" altLang="ja-JP" dirty="0">
                 <a:solidFill>
                   <a:schemeClr val="tx1"/>
                 </a:solidFill>
+                <a:latin typeface="Consolas" panose="020B0609020204030204" pitchFamily="49" charset="0"/>
+                <a:cs typeface="Consolas" panose="020B0609020204030204" pitchFamily="49" charset="0"/>
               </a:rPr>
               <a:t>cd $PBS_O_WORKDIR</a:t>
             </a:r>
@@ -17853,10 +17972,12 @@
               <a:defRPr/>
             </a:pPr>
             <a:r>
-              <a:rPr lang="en-US" altLang="ja-JP">
+              <a:rPr lang="en-US" altLang="ja-JP" dirty="0">
                 <a:solidFill>
                   <a:schemeClr val="tx1"/>
                 </a:solidFill>
+                <a:latin typeface="Consolas" panose="020B0609020204030204" pitchFamily="49" charset="0"/>
+                <a:cs typeface="Consolas" panose="020B0609020204030204" pitchFamily="49" charset="0"/>
               </a:rPr>
               <a:t>./a.out</a:t>
             </a:r>
@@ -17864,6 +17985,8 @@
               <a:solidFill>
                 <a:schemeClr val="tx1"/>
               </a:solidFill>
+              <a:latin typeface="Consolas" panose="020B0609020204030204" pitchFamily="49" charset="0"/>
+              <a:cs typeface="Consolas" panose="020B0609020204030204" pitchFamily="49" charset="0"/>
             </a:endParaRPr>
           </a:p>
         </p:txBody>
@@ -17882,7 +18005,7 @@
         </p:nvSpPr>
         <p:spPr>
           <a:xfrm>
-            <a:off x="3931920" y="3322320"/>
+            <a:off x="4102953" y="3320534"/>
             <a:ext cx="2031325" cy="369332"/>
           </a:xfrm>
           <a:prstGeom prst="rect">
@@ -17897,10 +18020,7 @@
             <a:pPr>
               <a:defRPr sz="1550"/>
             </a:pPr>
-            <a:r>
-              <a:rPr kumimoji="1" lang="ja-JP" altLang="en-US" sz="1550"/>
-              <a:t>How to run the job</a:t>
-            </a:r>
+            <a:endParaRPr kumimoji="1" lang="ja-JP" altLang="en-US" sz="1550"/>
           </a:p>
         </p:txBody>
       </p:sp>
@@ -17949,7 +18069,7 @@
         <p:spPr>
           <a:xfrm>
             <a:off x="3911600" y="2397760"/>
-            <a:ext cx="2031325" cy="369332"/>
+            <a:ext cx="2222678" cy="369332"/>
           </a:xfrm>
           <a:prstGeom prst="rect">
             <a:avLst/>
@@ -17958,17 +18078,14 @@
         </p:spPr>
         <p:txBody>
           <a:bodyPr wrap="square" rtlCol="0">
-            <a:normAutofit fontScale="62500" lnSpcReduction="20000"/>
+            <a:normAutofit/>
           </a:bodyPr>
           <a:lstStyle/>
           <a:p>
             <a:pPr>
               <a:defRPr/>
             </a:pPr>
-            <a:r>
-              <a:rPr kumimoji="1" lang="ja-JP" altLang="en-US"/>
-              <a:t>Resources requested by the job</a:t>
-            </a:r>
+            <a:endParaRPr kumimoji="1" lang="ja-JP" altLang="en-US"/>
           </a:p>
         </p:txBody>
       </p:sp>
@@ -18032,7 +18149,7 @@
         </p:nvCxnSpPr>
         <p:spPr>
           <a:xfrm flipH="1">
-            <a:off x="3413760" y="3505200"/>
+            <a:off x="3446500" y="3457470"/>
             <a:ext cx="508000" cy="0"/>
           </a:xfrm>
           <a:prstGeom prst="straightConnector1">
@@ -18074,8 +18191,8 @@
         </p:nvSpPr>
         <p:spPr>
           <a:xfrm>
-            <a:off x="640080" y="568960"/>
-            <a:ext cx="2723823" cy="369332"/>
+            <a:off x="640081" y="582255"/>
+            <a:ext cx="2224688" cy="369332"/>
           </a:xfrm>
           <a:prstGeom prst="rect">
             <a:avLst/>
@@ -18090,7 +18207,7 @@
               <a:defRPr sz="1750"/>
             </a:pPr>
             <a:r>
-              <a:rPr kumimoji="1" lang="ja-JP" altLang="en-US" sz="1750"/>
+              <a:rPr kumimoji="1" lang="ja-JP" altLang="en-US"/>
               <a:t>Prepare the job script</a:t>
             </a:r>
           </a:p>
@@ -18110,7 +18227,7 @@
         </p:nvSpPr>
         <p:spPr>
           <a:xfrm>
-            <a:off x="6593840" y="538480"/>
+            <a:off x="6599271" y="582255"/>
             <a:ext cx="1569660" cy="369332"/>
           </a:xfrm>
           <a:prstGeom prst="rect">
@@ -18126,7 +18243,7 @@
               <a:defRPr sz="1500"/>
             </a:pPr>
             <a:r>
-              <a:rPr kumimoji="1" lang="ja-JP" altLang="en-US" sz="1500"/>
+              <a:rPr kumimoji="1" lang="ja-JP" altLang="en-US"/>
               <a:t>Submit the job</a:t>
             </a:r>
           </a:p>
@@ -18146,13 +18263,18 @@
         </p:nvSpPr>
         <p:spPr>
           <a:xfrm>
-            <a:off x="2428240" y="1249680"/>
-            <a:ext cx="1316386" cy="369332"/>
+            <a:off x="2473380" y="1174836"/>
+            <a:ext cx="1468700" cy="369332"/>
           </a:xfrm>
           <a:prstGeom prst="rect">
             <a:avLst/>
           </a:prstGeom>
           <a:noFill/>
+          <a:ln>
+            <a:solidFill>
+              <a:schemeClr val="tx1"/>
+            </a:solidFill>
+          </a:ln>
         </p:spPr>
         <p:txBody>
           <a:bodyPr wrap="square" rtlCol="0"/>
@@ -18162,14 +18284,23 @@
               <a:defRPr sz="1450"/>
             </a:pPr>
             <a:r>
-              <a:rPr lang="en-US" altLang="ja-JP" sz="1450"/>
+              <a:rPr lang="en-US" altLang="ja-JP" sz="1450" dirty="0">
+                <a:latin typeface="Consolas" panose="020B0609020204030204" pitchFamily="49" charset="0"/>
+                <a:cs typeface="Consolas" panose="020B0609020204030204" pitchFamily="49" charset="0"/>
+              </a:rPr>
               <a:t>$ </a:t>
             </a:r>
             <a:r>
-              <a:rPr kumimoji="1" lang="en-US" altLang="ja-JP" sz="1450"/>
+              <a:rPr kumimoji="1" lang="en-US" altLang="ja-JP" sz="1450" dirty="0">
+                <a:latin typeface="Consolas" panose="020B0609020204030204" pitchFamily="49" charset="0"/>
+                <a:cs typeface="Consolas" panose="020B0609020204030204" pitchFamily="49" charset="0"/>
+              </a:rPr>
               <a:t>vim job.sh</a:t>
             </a:r>
-            <a:endParaRPr kumimoji="1" lang="ja-JP" altLang="en-US"/>
+            <a:endParaRPr kumimoji="1" lang="ja-JP" altLang="en-US">
+              <a:latin typeface="Consolas" panose="020B0609020204030204" pitchFamily="49" charset="0"/>
+              <a:cs typeface="Consolas" panose="020B0609020204030204" pitchFamily="49" charset="0"/>
+            </a:endParaRPr>
           </a:p>
         </p:txBody>
       </p:sp>
@@ -18187,13 +18318,18 @@
         </p:nvSpPr>
         <p:spPr>
           <a:xfrm>
-            <a:off x="6573520" y="1117600"/>
-            <a:ext cx="1430200" cy="369332"/>
+            <a:off x="6573520" y="1174836"/>
+            <a:ext cx="1612900" cy="369332"/>
           </a:xfrm>
           <a:prstGeom prst="rect">
             <a:avLst/>
           </a:prstGeom>
           <a:noFill/>
+          <a:ln>
+            <a:solidFill>
+              <a:schemeClr val="tx1"/>
+            </a:solidFill>
+          </a:ln>
         </p:spPr>
         <p:txBody>
           <a:bodyPr wrap="square" rtlCol="0"/>
@@ -18203,14 +18339,100 @@
               <a:defRPr sz="1450"/>
             </a:pPr>
             <a:r>
-              <a:rPr lang="en-US" altLang="ja-JP" sz="1450"/>
+              <a:rPr lang="en-US" altLang="ja-JP" sz="1450" dirty="0">
+                <a:latin typeface="Consolas" panose="020B0609020204030204" pitchFamily="49" charset="0"/>
+                <a:cs typeface="Consolas" panose="020B0609020204030204" pitchFamily="49" charset="0"/>
+              </a:rPr>
               <a:t>$ </a:t>
             </a:r>
             <a:r>
-              <a:rPr kumimoji="1" lang="en-US" altLang="ja-JP" sz="1450"/>
+              <a:rPr kumimoji="1" lang="en-US" altLang="ja-JP" sz="1450" dirty="0">
+                <a:latin typeface="Consolas" panose="020B0609020204030204" pitchFamily="49" charset="0"/>
+                <a:cs typeface="Consolas" panose="020B0609020204030204" pitchFamily="49" charset="0"/>
+              </a:rPr>
               <a:t>qsub job.sh</a:t>
             </a:r>
-            <a:endParaRPr kumimoji="1" lang="ja-JP" altLang="en-US"/>
+            <a:endParaRPr kumimoji="1" lang="ja-JP" altLang="en-US">
+              <a:latin typeface="Consolas" panose="020B0609020204030204" pitchFamily="49" charset="0"/>
+              <a:cs typeface="Consolas" panose="020B0609020204030204" pitchFamily="49" charset="0"/>
+            </a:endParaRPr>
+          </a:p>
+        </p:txBody>
+      </p:sp>
+      <p:sp>
+        <p:nvSpPr>
+          <p:cNvPr id="2" name="テキスト ボックス 1">
+            <a:extLst>
+              <a:ext uri="{FF2B5EF4-FFF2-40B4-BE49-F238E27FC236}">
+                <a16:creationId xmlns:a16="http://schemas.microsoft.com/office/drawing/2014/main" id="{7A1995B6-EC34-C53E-0D07-3F23B6BAC0A1}"/>
+              </a:ext>
+            </a:extLst>
+          </p:cNvPr>
+          <p:cNvSpPr txBox="1"/>
+          <p:nvPr/>
+        </p:nvSpPr>
+        <p:spPr>
+          <a:xfrm>
+            <a:off x="4024280" y="2237154"/>
+            <a:ext cx="2137636" cy="646331"/>
+          </a:xfrm>
+          <a:prstGeom prst="rect">
+            <a:avLst/>
+          </a:prstGeom>
+          <a:noFill/>
+        </p:spPr>
+        <p:txBody>
+          <a:bodyPr wrap="none" rtlCol="0">
+            <a:spAutoFit/>
+          </a:bodyPr>
+          <a:lstStyle/>
+          <a:p>
+            <a:r>
+              <a:rPr lang="ja-JP" altLang="en-US"/>
+              <a:t>Resources requested</a:t>
+            </a:r>
+            <a:endParaRPr lang="en-US" altLang="ja-JP" dirty="0"/>
+          </a:p>
+          <a:p>
+            <a:r>
+              <a:rPr lang="ja-JP" altLang="en-US"/>
+              <a:t>by the job</a:t>
+            </a:r>
+          </a:p>
+        </p:txBody>
+      </p:sp>
+      <p:sp>
+        <p:nvSpPr>
+          <p:cNvPr id="12" name="テキスト ボックス 11">
+            <a:extLst>
+              <a:ext uri="{FF2B5EF4-FFF2-40B4-BE49-F238E27FC236}">
+                <a16:creationId xmlns:a16="http://schemas.microsoft.com/office/drawing/2014/main" id="{AD65C9D2-3502-D8FB-A344-2A92E275BAD2}"/>
+              </a:ext>
+            </a:extLst>
+          </p:cNvPr>
+          <p:cNvSpPr txBox="1"/>
+          <p:nvPr/>
+        </p:nvSpPr>
+        <p:spPr>
+          <a:xfrm>
+            <a:off x="4054015" y="3272804"/>
+            <a:ext cx="2046939" cy="369332"/>
+          </a:xfrm>
+          <a:prstGeom prst="rect">
+            <a:avLst/>
+          </a:prstGeom>
+          <a:noFill/>
+        </p:spPr>
+        <p:txBody>
+          <a:bodyPr wrap="square">
+            <a:spAutoFit/>
+          </a:bodyPr>
+          <a:lstStyle/>
+          <a:p>
+            <a:r>
+              <a:rPr lang="ja-JP" altLang="en-US"/>
+              <a:t>How to run the job</a:t>
+            </a:r>
           </a:p>
         </p:txBody>
       </p:sp>
@@ -18428,17 +18650,14 @@
         </p:spPr>
         <p:txBody>
           <a:bodyPr wrap="square" rtlCol="0">
-            <a:normAutofit fontScale="62500" lnSpcReduction="20000"/>
+            <a:normAutofit/>
           </a:bodyPr>
           <a:lstStyle/>
           <a:p>
             <a:pPr>
               <a:defRPr/>
             </a:pPr>
-            <a:r>
-              <a:rPr kumimoji="1" lang="ja-JP" altLang="en-US"/>
-              <a:t>Large-scale computing is like group jump rope</a:t>
-            </a:r>
+            <a:endParaRPr kumimoji="1" lang="ja-JP" altLang="en-US"/>
           </a:p>
         </p:txBody>
       </p:sp>
@@ -18471,8 +18690,75 @@
             <a:pPr>
               <a:defRPr sz="1350"/>
             </a:pPr>
-            <a:r>
-              <a:rPr kumimoji="1" lang="ja-JP" altLang="en-US" sz="1350"/>
+            <a:endParaRPr kumimoji="1" lang="ja-JP" altLang="en-US" sz="1350"/>
+          </a:p>
+        </p:txBody>
+      </p:sp>
+      <p:sp>
+        <p:nvSpPr>
+          <p:cNvPr id="3" name="テキスト ボックス 2">
+            <a:extLst>
+              <a:ext uri="{FF2B5EF4-FFF2-40B4-BE49-F238E27FC236}">
+                <a16:creationId xmlns:a16="http://schemas.microsoft.com/office/drawing/2014/main" id="{5E05D09A-9C21-886B-855C-58270BEDFACF}"/>
+              </a:ext>
+            </a:extLst>
+          </p:cNvPr>
+          <p:cNvSpPr txBox="1"/>
+          <p:nvPr/>
+        </p:nvSpPr>
+        <p:spPr>
+          <a:xfrm>
+            <a:off x="2663802" y="680720"/>
+            <a:ext cx="4521446" cy="369332"/>
+          </a:xfrm>
+          <a:prstGeom prst="rect">
+            <a:avLst/>
+          </a:prstGeom>
+          <a:noFill/>
+        </p:spPr>
+        <p:txBody>
+          <a:bodyPr wrap="square">
+            <a:spAutoFit/>
+          </a:bodyPr>
+          <a:lstStyle/>
+          <a:p>
+            <a:r>
+              <a:rPr lang="ja-JP" altLang="en-US"/>
+              <a:t>Large-scale computing is like group jump rope</a:t>
+            </a:r>
+          </a:p>
+        </p:txBody>
+      </p:sp>
+      <p:sp>
+        <p:nvSpPr>
+          <p:cNvPr id="8" name="テキスト ボックス 7">
+            <a:extLst>
+              <a:ext uri="{FF2B5EF4-FFF2-40B4-BE49-F238E27FC236}">
+                <a16:creationId xmlns:a16="http://schemas.microsoft.com/office/drawing/2014/main" id="{F4F72A8A-F51E-552E-25DB-427F59700361}"/>
+              </a:ext>
+            </a:extLst>
+          </p:cNvPr>
+          <p:cNvSpPr txBox="1"/>
+          <p:nvPr/>
+        </p:nvSpPr>
+        <p:spPr>
+          <a:xfrm>
+            <a:off x="2663802" y="4128254"/>
+            <a:ext cx="4953836" cy="369332"/>
+          </a:xfrm>
+          <a:prstGeom prst="rect">
+            <a:avLst/>
+          </a:prstGeom>
+          <a:noFill/>
+        </p:spPr>
+        <p:txBody>
+          <a:bodyPr wrap="square">
+            <a:spAutoFit/>
+          </a:bodyPr>
+          <a:lstStyle/>
+          <a:p>
+            <a:r>
+              <a:rPr lang="ja-JP" altLang="en-US"/>
               <a:t>If even one person trips, the whole thing fails</a:t>
             </a:r>
           </a:p>
